--- a/public/lessons/year-6-maths/autumn/week-8/plan-operations-in-multi-step-problems/teaching-powerpoint-v1.pptx
+++ b/public/lessons/year-6-maths/autumn/week-8/plan-operations-in-multi-step-problems/teaching-powerpoint-v1.pptx
@@ -2,24 +2,24 @@
 <file path=ppt/presentation.xml><?xml version="1.0" encoding="utf-8"?>
 <p:presentation xmlns:p="http://schemas.openxmlformats.org/presentationml/2006/main">
   <p:sldMasterIdLst>
-    <p:sldMasterId xmlns:r="http://schemas.openxmlformats.org/officeDocument/2006/relationships" id="2147483648" r:id="Ra230e3a37ca64d39"/>
+    <p:sldMasterId xmlns:r="http://schemas.openxmlformats.org/officeDocument/2006/relationships" id="2147483648" r:id="R994dab834ec9488d"/>
   </p:sldMasterIdLst>
   <p:notesMasterIdLst>
-    <p:notesMasterId xmlns:r="http://schemas.openxmlformats.org/officeDocument/2006/relationships" r:id="R36a6422f268c40d4"/>
+    <p:notesMasterId xmlns:r="http://schemas.openxmlformats.org/officeDocument/2006/relationships" r:id="R35fd849b59db4660"/>
   </p:notesMasterIdLst>
   <p:sldIdLst>
-    <p:sldId xmlns:r="http://schemas.openxmlformats.org/officeDocument/2006/relationships" id="256" r:id="Rc9ed701745cd4093"/>
-    <p:sldId xmlns:r="http://schemas.openxmlformats.org/officeDocument/2006/relationships" id="257" r:id="Rf4ebd1205c3f42cc"/>
-    <p:sldId xmlns:r="http://schemas.openxmlformats.org/officeDocument/2006/relationships" id="258" r:id="R830a5f8084174721"/>
-    <p:sldId xmlns:r="http://schemas.openxmlformats.org/officeDocument/2006/relationships" id="259" r:id="R9cfc21bf53884cda"/>
-    <p:sldId xmlns:r="http://schemas.openxmlformats.org/officeDocument/2006/relationships" id="260" r:id="R0d90abd8272b4c3a"/>
-    <p:sldId xmlns:r="http://schemas.openxmlformats.org/officeDocument/2006/relationships" id="261" r:id="R2f0ac9c692424411"/>
-    <p:sldId xmlns:r="http://schemas.openxmlformats.org/officeDocument/2006/relationships" id="262" r:id="R3cb271f7d6834023"/>
-    <p:sldId xmlns:r="http://schemas.openxmlformats.org/officeDocument/2006/relationships" id="263" r:id="Ra7791bb2624948b7"/>
-    <p:sldId xmlns:r="http://schemas.openxmlformats.org/officeDocument/2006/relationships" id="264" r:id="Rb0932e589e6046e6"/>
-    <p:sldId xmlns:r="http://schemas.openxmlformats.org/officeDocument/2006/relationships" id="265" r:id="R050469954df54269"/>
-    <p:sldId xmlns:r="http://schemas.openxmlformats.org/officeDocument/2006/relationships" id="266" r:id="R40090865855044d5"/>
-    <p:sldId xmlns:r="http://schemas.openxmlformats.org/officeDocument/2006/relationships" id="267" r:id="R07eab2d9393a4dd7"/>
+    <p:sldId xmlns:r="http://schemas.openxmlformats.org/officeDocument/2006/relationships" id="256" r:id="R9f144456250b45a1"/>
+    <p:sldId xmlns:r="http://schemas.openxmlformats.org/officeDocument/2006/relationships" id="257" r:id="R58afc34ee40948bc"/>
+    <p:sldId xmlns:r="http://schemas.openxmlformats.org/officeDocument/2006/relationships" id="258" r:id="R249e808e18014d01"/>
+    <p:sldId xmlns:r="http://schemas.openxmlformats.org/officeDocument/2006/relationships" id="259" r:id="R27f24b092fcb4f96"/>
+    <p:sldId xmlns:r="http://schemas.openxmlformats.org/officeDocument/2006/relationships" id="260" r:id="R7dba3cb2cbac4c1f"/>
+    <p:sldId xmlns:r="http://schemas.openxmlformats.org/officeDocument/2006/relationships" id="261" r:id="Rffbc2ff4dd104f75"/>
+    <p:sldId xmlns:r="http://schemas.openxmlformats.org/officeDocument/2006/relationships" id="262" r:id="R820597b7dab24173"/>
+    <p:sldId xmlns:r="http://schemas.openxmlformats.org/officeDocument/2006/relationships" id="263" r:id="R0d46441a6eb14d11"/>
+    <p:sldId xmlns:r="http://schemas.openxmlformats.org/officeDocument/2006/relationships" id="264" r:id="R9c6f8b507f52404a"/>
+    <p:sldId xmlns:r="http://schemas.openxmlformats.org/officeDocument/2006/relationships" id="265" r:id="R9b948f5673674085"/>
+    <p:sldId xmlns:r="http://schemas.openxmlformats.org/officeDocument/2006/relationships" id="266" r:id="Rc08fb643b6374efe"/>
+    <p:sldId xmlns:r="http://schemas.openxmlformats.org/officeDocument/2006/relationships" id="267" r:id="R5b0dc0b7404a4137"/>
   </p:sldIdLst>
   <p:sldSz cx="12192000" cy="6858000"/>
   <p:notesSz cx="6858000" cy="9144000"/>
@@ -873,7 +873,7 @@
           <a:lstStyle xmlns:a="http://schemas.openxmlformats.org/drawingml/2006/main"/>
           <a:p xmlns:a="http://schemas.openxmlformats.org/drawingml/2006/main">
             <a:r>
-              <a:t>I do. Reveal the question, setup and each calculation stage one click at a time. Pupils watch before copying. Model answer: 48 x 125, then subtract 3,760. The answer is 2,240.</a:t>
+              <a:t>I do. Reveal the question, then reveal each mathematical change one click at a time. Point to the numbers and operation that changed before moving to the next line. Final answer: 48 x 125, then subtract 3,760. The answer is 2,240.</a:t>
             </a:r>
           </a:p>
         </p:txBody>
@@ -1291,7 +1291,7 @@
   </p:cSld>
   <p:clrMap bg1="lt1" tx1="dk1" bg2="lt2" tx2="dk2" accent1="accent1" accent2="accent2" accent3="accent3" accent4="accent4" accent5="accent5" accent6="accent6" hlink="hlink" folHlink="folHlink"/>
   <p:sldLayoutIdLst>
-    <p:sldLayoutId xmlns:r="http://schemas.openxmlformats.org/officeDocument/2006/relationships" id="2147483649" r:id="R975af85514f44b31"/>
+    <p:sldLayoutId xmlns:r="http://schemas.openxmlformats.org/officeDocument/2006/relationships" id="2147483649" r:id="R84b715fc5e72440b"/>
   </p:sldLayoutIdLst>
   <p:txStyles>
     <p:titleStyle>
@@ -1842,7 +1842,7 @@
           <p:cNvPr id="12" name="">
             <a:extLst xmlns:a="http://schemas.openxmlformats.org/drawingml/2006/main">
               <a:ext uri="{FF2B5EF4-FFF2-40B4-BE49-F238E27FC236}">
-                <a16:creationId xmlns:a16="http://schemas.microsoft.com/office/drawing/2014/main" id="{ECBB24A6-7715-4DD7-9449-C1B8934822EF}"/>
+                <a16:creationId xmlns:a16="http://schemas.microsoft.com/office/drawing/2014/main" id="{1280BF93-5586-4A90-9CE3-B7028F675684}"/>
               </a:ext>
             </a:extLst>
           </p:cNvPr>
@@ -1874,7 +1874,7 @@
           <p:cNvPr id="2" name="">
             <a:extLst xmlns:a="http://schemas.openxmlformats.org/drawingml/2006/main">
               <a:ext uri="{FF2B5EF4-FFF2-40B4-BE49-F238E27FC236}">
-                <a16:creationId xmlns:a16="http://schemas.microsoft.com/office/drawing/2014/main" id="{6458A2F3-21FE-4005-B779-0B1AE876B271}"/>
+                <a16:creationId xmlns:a16="http://schemas.microsoft.com/office/drawing/2014/main" id="{E89ED6EA-DC56-409B-9FBB-9DB20995B545}"/>
               </a:ext>
             </a:extLst>
           </p:cNvPr>
@@ -1931,7 +1931,7 @@
           <p:cNvPr id="3" name="">
             <a:extLst xmlns:a="http://schemas.openxmlformats.org/drawingml/2006/main">
               <a:ext uri="{FF2B5EF4-FFF2-40B4-BE49-F238E27FC236}">
-                <a16:creationId xmlns:a16="http://schemas.microsoft.com/office/drawing/2014/main" id="{74E0106F-B53B-4771-AFAA-E4EB0110C648}"/>
+                <a16:creationId xmlns:a16="http://schemas.microsoft.com/office/drawing/2014/main" id="{92DA06FB-6C0E-46A9-857D-775ADE577DFC}"/>
               </a:ext>
             </a:extLst>
           </p:cNvPr>
@@ -1965,7 +1965,7 @@
           <p:cNvPr id="4" name="">
             <a:extLst xmlns:a="http://schemas.openxmlformats.org/drawingml/2006/main">
               <a:ext uri="{FF2B5EF4-FFF2-40B4-BE49-F238E27FC236}">
-                <a16:creationId xmlns:a16="http://schemas.microsoft.com/office/drawing/2014/main" id="{757BC158-32EC-454B-B57A-97BB0D3FAEB0}"/>
+                <a16:creationId xmlns:a16="http://schemas.microsoft.com/office/drawing/2014/main" id="{4BF0326D-C799-42FB-99C8-0ACC69CD34D3}"/>
               </a:ext>
             </a:extLst>
           </p:cNvPr>
@@ -2022,7 +2022,7 @@
           <p:cNvPr id="5" name="">
             <a:extLst xmlns:a="http://schemas.openxmlformats.org/drawingml/2006/main">
               <a:ext uri="{FF2B5EF4-FFF2-40B4-BE49-F238E27FC236}">
-                <a16:creationId xmlns:a16="http://schemas.microsoft.com/office/drawing/2014/main" id="{6E76C37A-1ADC-4194-BBF1-4805AF315957}"/>
+                <a16:creationId xmlns:a16="http://schemas.microsoft.com/office/drawing/2014/main" id="{91D30F8A-7A18-48CD-8EB1-1729CB3138B8}"/>
               </a:ext>
             </a:extLst>
           </p:cNvPr>
@@ -2079,7 +2079,7 @@
           <p:cNvPr id="6" name="">
             <a:extLst xmlns:a="http://schemas.openxmlformats.org/drawingml/2006/main">
               <a:ext uri="{FF2B5EF4-FFF2-40B4-BE49-F238E27FC236}">
-                <a16:creationId xmlns:a16="http://schemas.microsoft.com/office/drawing/2014/main" id="{409F8460-FDB5-49C9-B62A-BCFF2EBA1D11}"/>
+                <a16:creationId xmlns:a16="http://schemas.microsoft.com/office/drawing/2014/main" id="{A34F139D-AB66-4BE5-A536-EA1EF11AE646}"/>
               </a:ext>
             </a:extLst>
           </p:cNvPr>
@@ -2113,7 +2113,7 @@
           <p:cNvPr id="7" name="">
             <a:extLst xmlns:a="http://schemas.openxmlformats.org/drawingml/2006/main">
               <a:ext uri="{FF2B5EF4-FFF2-40B4-BE49-F238E27FC236}">
-                <a16:creationId xmlns:a16="http://schemas.microsoft.com/office/drawing/2014/main" id="{6E03FA33-0AF2-4A35-8DD9-16BBB83635C7}"/>
+                <a16:creationId xmlns:a16="http://schemas.microsoft.com/office/drawing/2014/main" id="{6B377293-3191-4BD4-87C6-FD932C0D5313}"/>
               </a:ext>
             </a:extLst>
           </p:cNvPr>
@@ -2170,7 +2170,7 @@
           <p:cNvPr id="8" name="">
             <a:extLst xmlns:a="http://schemas.openxmlformats.org/drawingml/2006/main">
               <a:ext uri="{FF2B5EF4-FFF2-40B4-BE49-F238E27FC236}">
-                <a16:creationId xmlns:a16="http://schemas.microsoft.com/office/drawing/2014/main" id="{91A20A46-F0F0-4BD4-8616-CD7E2321A9F0}"/>
+                <a16:creationId xmlns:a16="http://schemas.microsoft.com/office/drawing/2014/main" id="{6D3142F5-4F5E-4E84-A70B-61036FCB541C}"/>
               </a:ext>
             </a:extLst>
           </p:cNvPr>
@@ -2227,7 +2227,7 @@
           <p:cNvPr id="9" name="">
             <a:extLst xmlns:a="http://schemas.openxmlformats.org/drawingml/2006/main">
               <a:ext uri="{FF2B5EF4-FFF2-40B4-BE49-F238E27FC236}">
-                <a16:creationId xmlns:a16="http://schemas.microsoft.com/office/drawing/2014/main" id="{E30DA487-0073-44F7-A805-31A2FA288B99}"/>
+                <a16:creationId xmlns:a16="http://schemas.microsoft.com/office/drawing/2014/main" id="{BF13E58F-4A66-4552-BE32-7044B32A5FCB}"/>
               </a:ext>
             </a:extLst>
           </p:cNvPr>
@@ -2284,7 +2284,7 @@
           <p:cNvPr id="10" name="">
             <a:extLst xmlns:a="http://schemas.openxmlformats.org/drawingml/2006/main">
               <a:ext uri="{FF2B5EF4-FFF2-40B4-BE49-F238E27FC236}">
-                <a16:creationId xmlns:a16="http://schemas.microsoft.com/office/drawing/2014/main" id="{474AAE37-76C5-4F59-AD62-159037C258A6}"/>
+                <a16:creationId xmlns:a16="http://schemas.microsoft.com/office/drawing/2014/main" id="{34B93A4E-C62F-46F5-AFB2-72C19A8D818E}"/>
               </a:ext>
             </a:extLst>
           </p:cNvPr>
@@ -2341,7 +2341,7 @@
           <p:cNvPr id="11" name="">
             <a:extLst xmlns:a="http://schemas.openxmlformats.org/drawingml/2006/main">
               <a:ext uri="{FF2B5EF4-FFF2-40B4-BE49-F238E27FC236}">
-                <a16:creationId xmlns:a16="http://schemas.microsoft.com/office/drawing/2014/main" id="{DF3546C8-4055-4803-8FB9-11C1EE338973}"/>
+                <a16:creationId xmlns:a16="http://schemas.microsoft.com/office/drawing/2014/main" id="{B5A6BE04-AF19-4343-8A04-D7AEB8E2FC48}"/>
               </a:ext>
             </a:extLst>
           </p:cNvPr>
@@ -2396,7 +2396,7 @@
     </p:spTree>
     <p:extLst>
       <p:ext uri="{BB962C8B-B14F-4D97-AF65-F5344CB8AC3E}">
-        <p14:creationId xmlns:p14="http://schemas.microsoft.com/office/powerpoint/2010/main" val="419177466"/>
+        <p14:creationId xmlns:p14="http://schemas.microsoft.com/office/powerpoint/2010/main" val="1457281590"/>
       </p:ext>
     </p:extLst>
   </p:cSld>
@@ -2427,7 +2427,7 @@
           <p:cNvPr id="14" name="">
             <a:extLst xmlns:a="http://schemas.openxmlformats.org/drawingml/2006/main">
               <a:ext uri="{FF2B5EF4-FFF2-40B4-BE49-F238E27FC236}">
-                <a16:creationId xmlns:a16="http://schemas.microsoft.com/office/drawing/2014/main" id="{C9D06615-344C-4D89-A1B0-3BD7A83FDDA9}"/>
+                <a16:creationId xmlns:a16="http://schemas.microsoft.com/office/drawing/2014/main" id="{B96CB7E0-D682-470C-A553-8D3CD8CB64D3}"/>
               </a:ext>
             </a:extLst>
           </p:cNvPr>
@@ -2459,7 +2459,7 @@
           <p:cNvPr id="2" name="">
             <a:extLst xmlns:a="http://schemas.openxmlformats.org/drawingml/2006/main">
               <a:ext uri="{FF2B5EF4-FFF2-40B4-BE49-F238E27FC236}">
-                <a16:creationId xmlns:a16="http://schemas.microsoft.com/office/drawing/2014/main" id="{ADB9A675-E097-4EB1-9D1B-DE44107225AE}"/>
+                <a16:creationId xmlns:a16="http://schemas.microsoft.com/office/drawing/2014/main" id="{6D005593-3BFA-4BBC-B855-C92D49C0B205}"/>
               </a:ext>
             </a:extLst>
           </p:cNvPr>
@@ -2516,7 +2516,7 @@
           <p:cNvPr id="3" name="">
             <a:extLst xmlns:a="http://schemas.openxmlformats.org/drawingml/2006/main">
               <a:ext uri="{FF2B5EF4-FFF2-40B4-BE49-F238E27FC236}">
-                <a16:creationId xmlns:a16="http://schemas.microsoft.com/office/drawing/2014/main" id="{64F98204-A16D-4AA9-A63F-1D96BCB872CA}"/>
+                <a16:creationId xmlns:a16="http://schemas.microsoft.com/office/drawing/2014/main" id="{31A4AC41-884D-41A7-8318-DFB9F7714900}"/>
               </a:ext>
             </a:extLst>
           </p:cNvPr>
@@ -2548,7 +2548,7 @@
           <p:cNvPr id="4" name="">
             <a:extLst xmlns:a="http://schemas.openxmlformats.org/drawingml/2006/main">
               <a:ext uri="{FF2B5EF4-FFF2-40B4-BE49-F238E27FC236}">
-                <a16:creationId xmlns:a16="http://schemas.microsoft.com/office/drawing/2014/main" id="{E7FB0D12-EAC4-4C60-A183-4F90E28C16D8}"/>
+                <a16:creationId xmlns:a16="http://schemas.microsoft.com/office/drawing/2014/main" id="{6D8875A2-2A58-48EE-A045-2225D8581288}"/>
               </a:ext>
             </a:extLst>
           </p:cNvPr>
@@ -2605,7 +2605,7 @@
           <p:cNvPr id="5" name="">
             <a:extLst xmlns:a="http://schemas.openxmlformats.org/drawingml/2006/main">
               <a:ext uri="{FF2B5EF4-FFF2-40B4-BE49-F238E27FC236}">
-                <a16:creationId xmlns:a16="http://schemas.microsoft.com/office/drawing/2014/main" id="{834CA0A7-1C5E-48E9-8BCC-BE33B6B8809C}"/>
+                <a16:creationId xmlns:a16="http://schemas.microsoft.com/office/drawing/2014/main" id="{14F04738-A32D-4961-9803-F86A341AD7AF}"/>
               </a:ext>
             </a:extLst>
           </p:cNvPr>
@@ -2662,7 +2662,7 @@
           <p:cNvPr id="6" name="">
             <a:extLst xmlns:a="http://schemas.openxmlformats.org/drawingml/2006/main">
               <a:ext uri="{FF2B5EF4-FFF2-40B4-BE49-F238E27FC236}">
-                <a16:creationId xmlns:a16="http://schemas.microsoft.com/office/drawing/2014/main" id="{AE85E564-1E11-404C-BB7F-C42418974F29}"/>
+                <a16:creationId xmlns:a16="http://schemas.microsoft.com/office/drawing/2014/main" id="{8B74B334-C47C-4A0E-AC44-A001F5509FF0}"/>
               </a:ext>
             </a:extLst>
           </p:cNvPr>
@@ -2719,7 +2719,7 @@
           <p:cNvPr id="7" name="">
             <a:extLst xmlns:a="http://schemas.openxmlformats.org/drawingml/2006/main">
               <a:ext uri="{FF2B5EF4-FFF2-40B4-BE49-F238E27FC236}">
-                <a16:creationId xmlns:a16="http://schemas.microsoft.com/office/drawing/2014/main" id="{A8D28E4A-C531-43E1-8C6B-42C47557B517}"/>
+                <a16:creationId xmlns:a16="http://schemas.microsoft.com/office/drawing/2014/main" id="{67AEEC64-E4A0-4D43-9108-11DDF3656B88}"/>
               </a:ext>
             </a:extLst>
           </p:cNvPr>
@@ -2751,7 +2751,7 @@
           <p:cNvPr id="8" name="">
             <a:extLst xmlns:a="http://schemas.openxmlformats.org/drawingml/2006/main">
               <a:ext uri="{FF2B5EF4-FFF2-40B4-BE49-F238E27FC236}">
-                <a16:creationId xmlns:a16="http://schemas.microsoft.com/office/drawing/2014/main" id="{CC1A7D84-2C1C-403A-806E-D923D5223E59}"/>
+                <a16:creationId xmlns:a16="http://schemas.microsoft.com/office/drawing/2014/main" id="{EAF0F111-23D4-4B85-A5D7-AD04CA80891B}"/>
               </a:ext>
             </a:extLst>
           </p:cNvPr>
@@ -2808,7 +2808,7 @@
           <p:cNvPr id="9" name="">
             <a:extLst xmlns:a="http://schemas.openxmlformats.org/drawingml/2006/main">
               <a:ext uri="{FF2B5EF4-FFF2-40B4-BE49-F238E27FC236}">
-                <a16:creationId xmlns:a16="http://schemas.microsoft.com/office/drawing/2014/main" id="{824E1046-09CD-4BEE-ACFB-CF2132C0E072}"/>
+                <a16:creationId xmlns:a16="http://schemas.microsoft.com/office/drawing/2014/main" id="{EDF6EE2C-C38F-4D9E-841B-BD924F6570D5}"/>
               </a:ext>
             </a:extLst>
           </p:cNvPr>
@@ -2865,7 +2865,7 @@
           <p:cNvPr id="10" name="">
             <a:extLst xmlns:a="http://schemas.openxmlformats.org/drawingml/2006/main">
               <a:ext uri="{FF2B5EF4-FFF2-40B4-BE49-F238E27FC236}">
-                <a16:creationId xmlns:a16="http://schemas.microsoft.com/office/drawing/2014/main" id="{74E46ED9-A1F0-45A4-A176-6EB44A0725B6}"/>
+                <a16:creationId xmlns:a16="http://schemas.microsoft.com/office/drawing/2014/main" id="{A5BE2009-3AB4-4C1A-9514-883CA62B7A0B}"/>
               </a:ext>
             </a:extLst>
           </p:cNvPr>
@@ -2922,7 +2922,7 @@
           <p:cNvPr id="11" name="">
             <a:extLst xmlns:a="http://schemas.openxmlformats.org/drawingml/2006/main">
               <a:ext uri="{FF2B5EF4-FFF2-40B4-BE49-F238E27FC236}">
-                <a16:creationId xmlns:a16="http://schemas.microsoft.com/office/drawing/2014/main" id="{7A6D92D0-CEEE-449D-854D-369D5E00BCC8}"/>
+                <a16:creationId xmlns:a16="http://schemas.microsoft.com/office/drawing/2014/main" id="{68F471A1-8AA5-4FC8-9D4F-9709FCDE3FD9}"/>
               </a:ext>
             </a:extLst>
           </p:cNvPr>
@@ -2979,7 +2979,7 @@
           <p:cNvPr id="12" name="">
             <a:extLst xmlns:a="http://schemas.openxmlformats.org/drawingml/2006/main">
               <a:ext uri="{FF2B5EF4-FFF2-40B4-BE49-F238E27FC236}">
-                <a16:creationId xmlns:a16="http://schemas.microsoft.com/office/drawing/2014/main" id="{9A40FF7F-62B1-4476-9EB3-1C5FA484B4AB}"/>
+                <a16:creationId xmlns:a16="http://schemas.microsoft.com/office/drawing/2014/main" id="{2EFC3D06-D4C3-4400-8F54-104282090C4B}"/>
               </a:ext>
             </a:extLst>
           </p:cNvPr>
@@ -3036,7 +3036,7 @@
           <p:cNvPr id="13" name="">
             <a:extLst xmlns:a="http://schemas.openxmlformats.org/drawingml/2006/main">
               <a:ext uri="{FF2B5EF4-FFF2-40B4-BE49-F238E27FC236}">
-                <a16:creationId xmlns:a16="http://schemas.microsoft.com/office/drawing/2014/main" id="{15EC9D81-A7FD-4615-B23A-33BA1050B9E1}"/>
+                <a16:creationId xmlns:a16="http://schemas.microsoft.com/office/drawing/2014/main" id="{1E065247-D18B-48D9-987E-6C674422A50D}"/>
               </a:ext>
             </a:extLst>
           </p:cNvPr>
@@ -3091,7 +3091,7 @@
     </p:spTree>
     <p:extLst>
       <p:ext uri="{BB962C8B-B14F-4D97-AF65-F5344CB8AC3E}">
-        <p14:creationId xmlns:p14="http://schemas.microsoft.com/office/powerpoint/2010/main" val="805262496"/>
+        <p14:creationId xmlns:p14="http://schemas.microsoft.com/office/powerpoint/2010/main" val="284264421"/>
       </p:ext>
     </p:extLst>
   </p:cSld>
@@ -3292,7 +3292,7 @@
           <p:cNvPr id="19" name="">
             <a:extLst xmlns:a="http://schemas.openxmlformats.org/drawingml/2006/main">
               <a:ext uri="{FF2B5EF4-FFF2-40B4-BE49-F238E27FC236}">
-                <a16:creationId xmlns:a16="http://schemas.microsoft.com/office/drawing/2014/main" id="{0534C2F8-258A-463F-8D7B-9D6C5AAB950F}"/>
+                <a16:creationId xmlns:a16="http://schemas.microsoft.com/office/drawing/2014/main" id="{BC36CE44-CDD3-498F-B27E-2D1369ECC1C2}"/>
               </a:ext>
             </a:extLst>
           </p:cNvPr>
@@ -3324,7 +3324,7 @@
           <p:cNvPr id="2" name="">
             <a:extLst xmlns:a="http://schemas.openxmlformats.org/drawingml/2006/main">
               <a:ext uri="{FF2B5EF4-FFF2-40B4-BE49-F238E27FC236}">
-                <a16:creationId xmlns:a16="http://schemas.microsoft.com/office/drawing/2014/main" id="{AF8F1BF8-FB57-4C48-A4A8-233460EF8F3F}"/>
+                <a16:creationId xmlns:a16="http://schemas.microsoft.com/office/drawing/2014/main" id="{8FD581B6-5522-400C-B589-72D81C7AE8DD}"/>
               </a:ext>
             </a:extLst>
           </p:cNvPr>
@@ -3381,7 +3381,7 @@
           <p:cNvPr id="3" name="">
             <a:extLst xmlns:a="http://schemas.openxmlformats.org/drawingml/2006/main">
               <a:ext uri="{FF2B5EF4-FFF2-40B4-BE49-F238E27FC236}">
-                <a16:creationId xmlns:a16="http://schemas.microsoft.com/office/drawing/2014/main" id="{7C4137A0-B2DE-41ED-874C-8C41B68A2F3D}"/>
+                <a16:creationId xmlns:a16="http://schemas.microsoft.com/office/drawing/2014/main" id="{6E9F6527-AA19-47BA-A16A-0D4CE8E4A83E}"/>
               </a:ext>
             </a:extLst>
           </p:cNvPr>
@@ -3413,7 +3413,7 @@
           <p:cNvPr id="4" name="">
             <a:extLst xmlns:a="http://schemas.openxmlformats.org/drawingml/2006/main">
               <a:ext uri="{FF2B5EF4-FFF2-40B4-BE49-F238E27FC236}">
-                <a16:creationId xmlns:a16="http://schemas.microsoft.com/office/drawing/2014/main" id="{103AD617-D364-4351-9A0F-7923D8FCA891}"/>
+                <a16:creationId xmlns:a16="http://schemas.microsoft.com/office/drawing/2014/main" id="{37A37096-8BAE-4645-9F6A-EB3301E96331}"/>
               </a:ext>
             </a:extLst>
           </p:cNvPr>
@@ -3470,7 +3470,7 @@
           <p:cNvPr id="5" name="">
             <a:extLst xmlns:a="http://schemas.openxmlformats.org/drawingml/2006/main">
               <a:ext uri="{FF2B5EF4-FFF2-40B4-BE49-F238E27FC236}">
-                <a16:creationId xmlns:a16="http://schemas.microsoft.com/office/drawing/2014/main" id="{1A11E7B1-D43C-4CB7-87A9-41434354EA7F}"/>
+                <a16:creationId xmlns:a16="http://schemas.microsoft.com/office/drawing/2014/main" id="{023FF31A-D295-410B-918B-F02AB9506576}"/>
               </a:ext>
             </a:extLst>
           </p:cNvPr>
@@ -3527,7 +3527,7 @@
           <p:cNvPr id="6" name="">
             <a:extLst xmlns:a="http://schemas.openxmlformats.org/drawingml/2006/main">
               <a:ext uri="{FF2B5EF4-FFF2-40B4-BE49-F238E27FC236}">
-                <a16:creationId xmlns:a16="http://schemas.microsoft.com/office/drawing/2014/main" id="{80980BBE-38BD-4ABE-A175-BD45CF657F45}"/>
+                <a16:creationId xmlns:a16="http://schemas.microsoft.com/office/drawing/2014/main" id="{F801AE73-ADBA-4D2D-9CDF-786A28863143}"/>
               </a:ext>
             </a:extLst>
           </p:cNvPr>
@@ -3584,7 +3584,7 @@
           <p:cNvPr id="7" name="">
             <a:extLst xmlns:a="http://schemas.openxmlformats.org/drawingml/2006/main">
               <a:ext uri="{FF2B5EF4-FFF2-40B4-BE49-F238E27FC236}">
-                <a16:creationId xmlns:a16="http://schemas.microsoft.com/office/drawing/2014/main" id="{6DA6781B-652E-479C-A067-D2BCBD1C302A}"/>
+                <a16:creationId xmlns:a16="http://schemas.microsoft.com/office/drawing/2014/main" id="{49A7DFA3-D093-4C0F-86C3-7DA4028F5E62}"/>
               </a:ext>
             </a:extLst>
           </p:cNvPr>
@@ -3616,7 +3616,7 @@
           <p:cNvPr id="8" name="">
             <a:extLst xmlns:a="http://schemas.openxmlformats.org/drawingml/2006/main">
               <a:ext uri="{FF2B5EF4-FFF2-40B4-BE49-F238E27FC236}">
-                <a16:creationId xmlns:a16="http://schemas.microsoft.com/office/drawing/2014/main" id="{944EBDF2-00BA-496E-B299-323356950CFF}"/>
+                <a16:creationId xmlns:a16="http://schemas.microsoft.com/office/drawing/2014/main" id="{ACE1EA2E-8582-40B9-8D19-69C529BAE683}"/>
               </a:ext>
             </a:extLst>
           </p:cNvPr>
@@ -3673,7 +3673,7 @@
           <p:cNvPr id="9" name="">
             <a:extLst xmlns:a="http://schemas.openxmlformats.org/drawingml/2006/main">
               <a:ext uri="{FF2B5EF4-FFF2-40B4-BE49-F238E27FC236}">
-                <a16:creationId xmlns:a16="http://schemas.microsoft.com/office/drawing/2014/main" id="{A28E73B5-ABDB-4759-BF1A-50F9A606D066}"/>
+                <a16:creationId xmlns:a16="http://schemas.microsoft.com/office/drawing/2014/main" id="{9F1AA1AE-55DE-4E7C-8169-09C10308B78E}"/>
               </a:ext>
             </a:extLst>
           </p:cNvPr>
@@ -3730,7 +3730,7 @@
           <p:cNvPr id="10" name="">
             <a:extLst xmlns:a="http://schemas.openxmlformats.org/drawingml/2006/main">
               <a:ext uri="{FF2B5EF4-FFF2-40B4-BE49-F238E27FC236}">
-                <a16:creationId xmlns:a16="http://schemas.microsoft.com/office/drawing/2014/main" id="{2A535CD8-FDFA-4AF5-A577-ABB912F50A44}"/>
+                <a16:creationId xmlns:a16="http://schemas.microsoft.com/office/drawing/2014/main" id="{5F326860-68B0-4E3A-89CC-16426FA4328F}"/>
               </a:ext>
             </a:extLst>
           </p:cNvPr>
@@ -3787,7 +3787,7 @@
           <p:cNvPr id="11" name="">
             <a:extLst xmlns:a="http://schemas.openxmlformats.org/drawingml/2006/main">
               <a:ext uri="{FF2B5EF4-FFF2-40B4-BE49-F238E27FC236}">
-                <a16:creationId xmlns:a16="http://schemas.microsoft.com/office/drawing/2014/main" id="{FB408119-077A-4FE7-A422-5A930F7EA4E0}"/>
+                <a16:creationId xmlns:a16="http://schemas.microsoft.com/office/drawing/2014/main" id="{1C00045F-6CA4-4FAA-8EB7-4FA19307650F}"/>
               </a:ext>
             </a:extLst>
           </p:cNvPr>
@@ -3821,7 +3821,7 @@
           <p:cNvPr id="12" name="">
             <a:extLst xmlns:a="http://schemas.openxmlformats.org/drawingml/2006/main">
               <a:ext uri="{FF2B5EF4-FFF2-40B4-BE49-F238E27FC236}">
-                <a16:creationId xmlns:a16="http://schemas.microsoft.com/office/drawing/2014/main" id="{2CCA1127-6B64-4DD7-9AF5-EA930BD1AFCF}"/>
+                <a16:creationId xmlns:a16="http://schemas.microsoft.com/office/drawing/2014/main" id="{D1F6F7E2-12E9-47D8-A2F0-70A32E4000B5}"/>
               </a:ext>
             </a:extLst>
           </p:cNvPr>
@@ -3878,7 +3878,7 @@
           <p:cNvPr id="13" name="">
             <a:extLst xmlns:a="http://schemas.openxmlformats.org/drawingml/2006/main">
               <a:ext uri="{FF2B5EF4-FFF2-40B4-BE49-F238E27FC236}">
-                <a16:creationId xmlns:a16="http://schemas.microsoft.com/office/drawing/2014/main" id="{9BD0639C-3C8D-4CBD-9365-2E7D98E48877}"/>
+                <a16:creationId xmlns:a16="http://schemas.microsoft.com/office/drawing/2014/main" id="{29466239-27ED-4F87-8D82-F31D5FA42178}"/>
               </a:ext>
             </a:extLst>
           </p:cNvPr>
@@ -3935,7 +3935,7 @@
           <p:cNvPr id="14" name="">
             <a:extLst xmlns:a="http://schemas.openxmlformats.org/drawingml/2006/main">
               <a:ext uri="{FF2B5EF4-FFF2-40B4-BE49-F238E27FC236}">
-                <a16:creationId xmlns:a16="http://schemas.microsoft.com/office/drawing/2014/main" id="{C39BDEA6-DE36-4997-AA31-1FB30449B734}"/>
+                <a16:creationId xmlns:a16="http://schemas.microsoft.com/office/drawing/2014/main" id="{54FFD225-C6F4-47EA-9C3E-20942F411BE1}"/>
               </a:ext>
             </a:extLst>
           </p:cNvPr>
@@ -3992,7 +3992,7 @@
           <p:cNvPr id="15" name="">
             <a:extLst xmlns:a="http://schemas.openxmlformats.org/drawingml/2006/main">
               <a:ext uri="{FF2B5EF4-FFF2-40B4-BE49-F238E27FC236}">
-                <a16:creationId xmlns:a16="http://schemas.microsoft.com/office/drawing/2014/main" id="{EBDC7B98-6456-42D8-9CA3-D25B0641D9B4}"/>
+                <a16:creationId xmlns:a16="http://schemas.microsoft.com/office/drawing/2014/main" id="{76FDD278-FF19-4A43-A976-BFC4A6465BB2}"/>
               </a:ext>
             </a:extLst>
           </p:cNvPr>
@@ -4026,7 +4026,7 @@
           <p:cNvPr id="16" name="">
             <a:extLst xmlns:a="http://schemas.openxmlformats.org/drawingml/2006/main">
               <a:ext uri="{FF2B5EF4-FFF2-40B4-BE49-F238E27FC236}">
-                <a16:creationId xmlns:a16="http://schemas.microsoft.com/office/drawing/2014/main" id="{C6D832F8-993D-488B-B179-0F1C3D3CF8BC}"/>
+                <a16:creationId xmlns:a16="http://schemas.microsoft.com/office/drawing/2014/main" id="{ABB26488-0328-4A0A-BC97-0608D589C0C6}"/>
               </a:ext>
             </a:extLst>
           </p:cNvPr>
@@ -4083,7 +4083,7 @@
           <p:cNvPr id="17" name="">
             <a:extLst xmlns:a="http://schemas.openxmlformats.org/drawingml/2006/main">
               <a:ext uri="{FF2B5EF4-FFF2-40B4-BE49-F238E27FC236}">
-                <a16:creationId xmlns:a16="http://schemas.microsoft.com/office/drawing/2014/main" id="{13B4A88F-7662-4C66-9F07-8088AC5DDE61}"/>
+                <a16:creationId xmlns:a16="http://schemas.microsoft.com/office/drawing/2014/main" id="{0E020020-01EF-4C2D-A3E2-18DD392DDF3B}"/>
               </a:ext>
             </a:extLst>
           </p:cNvPr>
@@ -4140,7 +4140,7 @@
           <p:cNvPr id="18" name="">
             <a:extLst xmlns:a="http://schemas.openxmlformats.org/drawingml/2006/main">
               <a:ext uri="{FF2B5EF4-FFF2-40B4-BE49-F238E27FC236}">
-                <a16:creationId xmlns:a16="http://schemas.microsoft.com/office/drawing/2014/main" id="{CF990489-CFB0-485A-B455-8B8032B71B20}"/>
+                <a16:creationId xmlns:a16="http://schemas.microsoft.com/office/drawing/2014/main" id="{99DBBB59-50EA-4C2F-B3E9-CEE055C0C2A5}"/>
               </a:ext>
             </a:extLst>
           </p:cNvPr>
@@ -4195,7 +4195,7 @@
     </p:spTree>
     <p:extLst>
       <p:ext uri="{BB962C8B-B14F-4D97-AF65-F5344CB8AC3E}">
-        <p14:creationId xmlns:p14="http://schemas.microsoft.com/office/powerpoint/2010/main" val="932906820"/>
+        <p14:creationId xmlns:p14="http://schemas.microsoft.com/office/powerpoint/2010/main" val="486787106"/>
       </p:ext>
     </p:extLst>
   </p:cSld>
@@ -4350,7 +4350,7 @@
           <p:cNvPr id="23" name="">
             <a:extLst xmlns:a="http://schemas.openxmlformats.org/drawingml/2006/main">
               <a:ext uri="{FF2B5EF4-FFF2-40B4-BE49-F238E27FC236}">
-                <a16:creationId xmlns:a16="http://schemas.microsoft.com/office/drawing/2014/main" id="{E8B37E11-7329-49B9-AEA3-86702E4FA2AF}"/>
+                <a16:creationId xmlns:a16="http://schemas.microsoft.com/office/drawing/2014/main" id="{082EEDFE-C119-4B84-AFEC-F2D82B0ADC57}"/>
               </a:ext>
             </a:extLst>
           </p:cNvPr>
@@ -4382,7 +4382,7 @@
           <p:cNvPr id="2" name="">
             <a:extLst xmlns:a="http://schemas.openxmlformats.org/drawingml/2006/main">
               <a:ext uri="{FF2B5EF4-FFF2-40B4-BE49-F238E27FC236}">
-                <a16:creationId xmlns:a16="http://schemas.microsoft.com/office/drawing/2014/main" id="{B18FA80B-99EB-402F-A872-C372DA5EFF4A}"/>
+                <a16:creationId xmlns:a16="http://schemas.microsoft.com/office/drawing/2014/main" id="{573F38F0-A109-4E91-ACAD-2AEE718F3AE2}"/>
               </a:ext>
             </a:extLst>
           </p:cNvPr>
@@ -4439,7 +4439,7 @@
           <p:cNvPr id="3" name="">
             <a:extLst xmlns:a="http://schemas.openxmlformats.org/drawingml/2006/main">
               <a:ext uri="{FF2B5EF4-FFF2-40B4-BE49-F238E27FC236}">
-                <a16:creationId xmlns:a16="http://schemas.microsoft.com/office/drawing/2014/main" id="{74960C6F-845F-45A7-A826-D5663BCD34CC}"/>
+                <a16:creationId xmlns:a16="http://schemas.microsoft.com/office/drawing/2014/main" id="{5E23187D-ECF5-40F3-B880-3BF4DBCA4256}"/>
               </a:ext>
             </a:extLst>
           </p:cNvPr>
@@ -4471,7 +4471,7 @@
           <p:cNvPr id="4" name="">
             <a:extLst xmlns:a="http://schemas.openxmlformats.org/drawingml/2006/main">
               <a:ext uri="{FF2B5EF4-FFF2-40B4-BE49-F238E27FC236}">
-                <a16:creationId xmlns:a16="http://schemas.microsoft.com/office/drawing/2014/main" id="{9CFD4D4D-3921-4FD4-AEF0-E253E188E582}"/>
+                <a16:creationId xmlns:a16="http://schemas.microsoft.com/office/drawing/2014/main" id="{C7E34031-E326-4DE4-BA55-8826CFD7EAAA}"/>
               </a:ext>
             </a:extLst>
           </p:cNvPr>
@@ -4528,7 +4528,7 @@
           <p:cNvPr id="5" name="">
             <a:extLst xmlns:a="http://schemas.openxmlformats.org/drawingml/2006/main">
               <a:ext uri="{FF2B5EF4-FFF2-40B4-BE49-F238E27FC236}">
-                <a16:creationId xmlns:a16="http://schemas.microsoft.com/office/drawing/2014/main" id="{9AA187C7-D73C-4BA1-AEC0-AD02862E9417}"/>
+                <a16:creationId xmlns:a16="http://schemas.microsoft.com/office/drawing/2014/main" id="{29080868-2787-4BB5-8339-6F06E099BFFB}"/>
               </a:ext>
             </a:extLst>
           </p:cNvPr>
@@ -4585,7 +4585,7 @@
           <p:cNvPr id="6" name="">
             <a:extLst xmlns:a="http://schemas.openxmlformats.org/drawingml/2006/main">
               <a:ext uri="{FF2B5EF4-FFF2-40B4-BE49-F238E27FC236}">
-                <a16:creationId xmlns:a16="http://schemas.microsoft.com/office/drawing/2014/main" id="{C2B140ED-86B9-4532-AB3F-AADA89D48F1C}"/>
+                <a16:creationId xmlns:a16="http://schemas.microsoft.com/office/drawing/2014/main" id="{C7FBF93F-5A9D-4CE4-8C90-100FDD0972E1}"/>
               </a:ext>
             </a:extLst>
           </p:cNvPr>
@@ -4642,7 +4642,7 @@
           <p:cNvPr id="7" name="">
             <a:extLst xmlns:a="http://schemas.openxmlformats.org/drawingml/2006/main">
               <a:ext uri="{FF2B5EF4-FFF2-40B4-BE49-F238E27FC236}">
-                <a16:creationId xmlns:a16="http://schemas.microsoft.com/office/drawing/2014/main" id="{5E73AFA5-B184-459D-9D43-4BD9D9B0D0B2}"/>
+                <a16:creationId xmlns:a16="http://schemas.microsoft.com/office/drawing/2014/main" id="{1954D9D7-A943-4407-AA04-9AA64787526E}"/>
               </a:ext>
             </a:extLst>
           </p:cNvPr>
@@ -4674,7 +4674,7 @@
           <p:cNvPr id="8" name="">
             <a:extLst xmlns:a="http://schemas.openxmlformats.org/drawingml/2006/main">
               <a:ext uri="{FF2B5EF4-FFF2-40B4-BE49-F238E27FC236}">
-                <a16:creationId xmlns:a16="http://schemas.microsoft.com/office/drawing/2014/main" id="{146CBCFD-025A-497D-BEB9-44BF36620D5E}"/>
+                <a16:creationId xmlns:a16="http://schemas.microsoft.com/office/drawing/2014/main" id="{552C55B0-4E9A-4968-BFD7-5217CE9C840A}"/>
               </a:ext>
             </a:extLst>
           </p:cNvPr>
@@ -4731,7 +4731,7 @@
           <p:cNvPr id="9" name="">
             <a:extLst xmlns:a="http://schemas.openxmlformats.org/drawingml/2006/main">
               <a:ext uri="{FF2B5EF4-FFF2-40B4-BE49-F238E27FC236}">
-                <a16:creationId xmlns:a16="http://schemas.microsoft.com/office/drawing/2014/main" id="{850709FD-F776-4939-A4FD-F65EB7391D84}"/>
+                <a16:creationId xmlns:a16="http://schemas.microsoft.com/office/drawing/2014/main" id="{72B876FC-B38E-4C17-AD4C-08A5FCE3D5D1}"/>
               </a:ext>
             </a:extLst>
           </p:cNvPr>
@@ -4788,7 +4788,7 @@
           <p:cNvPr id="10" name="">
             <a:extLst xmlns:a="http://schemas.openxmlformats.org/drawingml/2006/main">
               <a:ext uri="{FF2B5EF4-FFF2-40B4-BE49-F238E27FC236}">
-                <a16:creationId xmlns:a16="http://schemas.microsoft.com/office/drawing/2014/main" id="{28C1542C-3A89-47F9-BEAE-D32BFF112B69}"/>
+                <a16:creationId xmlns:a16="http://schemas.microsoft.com/office/drawing/2014/main" id="{A6A99E6C-529F-4E14-A3B8-8DE447B3C9BD}"/>
               </a:ext>
             </a:extLst>
           </p:cNvPr>
@@ -4822,7 +4822,7 @@
           <p:cNvPr id="11" name="">
             <a:extLst xmlns:a="http://schemas.openxmlformats.org/drawingml/2006/main">
               <a:ext uri="{FF2B5EF4-FFF2-40B4-BE49-F238E27FC236}">
-                <a16:creationId xmlns:a16="http://schemas.microsoft.com/office/drawing/2014/main" id="{D7A59150-25D2-47B5-B0F6-A1BCF613B377}"/>
+                <a16:creationId xmlns:a16="http://schemas.microsoft.com/office/drawing/2014/main" id="{E795A939-9FFF-4CA7-8A75-A62C99655CF7}"/>
               </a:ext>
             </a:extLst>
           </p:cNvPr>
@@ -4854,7 +4854,7 @@
           <p:cNvPr id="12" name="">
             <a:extLst xmlns:a="http://schemas.openxmlformats.org/drawingml/2006/main">
               <a:ext uri="{FF2B5EF4-FFF2-40B4-BE49-F238E27FC236}">
-                <a16:creationId xmlns:a16="http://schemas.microsoft.com/office/drawing/2014/main" id="{5504C8C6-7408-474A-B9D9-66B0D108DADA}"/>
+                <a16:creationId xmlns:a16="http://schemas.microsoft.com/office/drawing/2014/main" id="{A00D9B10-0F41-419B-88E7-25BECAF20D78}"/>
               </a:ext>
             </a:extLst>
           </p:cNvPr>
@@ -4911,7 +4911,7 @@
           <p:cNvPr id="13" name="">
             <a:extLst xmlns:a="http://schemas.openxmlformats.org/drawingml/2006/main">
               <a:ext uri="{FF2B5EF4-FFF2-40B4-BE49-F238E27FC236}">
-                <a16:creationId xmlns:a16="http://schemas.microsoft.com/office/drawing/2014/main" id="{A3098316-0068-4F4E-BEF4-728568151D2E}"/>
+                <a16:creationId xmlns:a16="http://schemas.microsoft.com/office/drawing/2014/main" id="{084F8D95-9FD2-4420-B0B4-02C666D7C54D}"/>
               </a:ext>
             </a:extLst>
           </p:cNvPr>
@@ -4968,7 +4968,7 @@
           <p:cNvPr id="14" name="">
             <a:extLst xmlns:a="http://schemas.openxmlformats.org/drawingml/2006/main">
               <a:ext uri="{FF2B5EF4-FFF2-40B4-BE49-F238E27FC236}">
-                <a16:creationId xmlns:a16="http://schemas.microsoft.com/office/drawing/2014/main" id="{58C129C2-2741-4323-8D27-653974C5F14D}"/>
+                <a16:creationId xmlns:a16="http://schemas.microsoft.com/office/drawing/2014/main" id="{26AB2139-B5AF-44C3-A412-08A12685DF25}"/>
               </a:ext>
             </a:extLst>
           </p:cNvPr>
@@ -5002,7 +5002,7 @@
           <p:cNvPr id="15" name="">
             <a:extLst xmlns:a="http://schemas.openxmlformats.org/drawingml/2006/main">
               <a:ext uri="{FF2B5EF4-FFF2-40B4-BE49-F238E27FC236}">
-                <a16:creationId xmlns:a16="http://schemas.microsoft.com/office/drawing/2014/main" id="{744B3859-A63C-4A22-96ED-B5096E97107C}"/>
+                <a16:creationId xmlns:a16="http://schemas.microsoft.com/office/drawing/2014/main" id="{FFE9A48D-9EED-40BA-A4B5-06111D1C3E65}"/>
               </a:ext>
             </a:extLst>
           </p:cNvPr>
@@ -5034,7 +5034,7 @@
           <p:cNvPr id="16" name="">
             <a:extLst xmlns:a="http://schemas.openxmlformats.org/drawingml/2006/main">
               <a:ext uri="{FF2B5EF4-FFF2-40B4-BE49-F238E27FC236}">
-                <a16:creationId xmlns:a16="http://schemas.microsoft.com/office/drawing/2014/main" id="{79A66490-56D2-41AE-9CBF-551FFBDB926B}"/>
+                <a16:creationId xmlns:a16="http://schemas.microsoft.com/office/drawing/2014/main" id="{53B02026-B0FB-4259-AD01-E0A4B285C365}"/>
               </a:ext>
             </a:extLst>
           </p:cNvPr>
@@ -5091,7 +5091,7 @@
           <p:cNvPr id="17" name="">
             <a:extLst xmlns:a="http://schemas.openxmlformats.org/drawingml/2006/main">
               <a:ext uri="{FF2B5EF4-FFF2-40B4-BE49-F238E27FC236}">
-                <a16:creationId xmlns:a16="http://schemas.microsoft.com/office/drawing/2014/main" id="{1588B4FF-1E9B-4C91-AFB7-7DA57BAD8E8F}"/>
+                <a16:creationId xmlns:a16="http://schemas.microsoft.com/office/drawing/2014/main" id="{F15C7FAE-E785-4A3A-8D4D-07E7B2A9640B}"/>
               </a:ext>
             </a:extLst>
           </p:cNvPr>
@@ -5148,7 +5148,7 @@
           <p:cNvPr id="18" name="">
             <a:extLst xmlns:a="http://schemas.openxmlformats.org/drawingml/2006/main">
               <a:ext uri="{FF2B5EF4-FFF2-40B4-BE49-F238E27FC236}">
-                <a16:creationId xmlns:a16="http://schemas.microsoft.com/office/drawing/2014/main" id="{77519EE8-325D-46B6-AFEA-248CFCD0485F}"/>
+                <a16:creationId xmlns:a16="http://schemas.microsoft.com/office/drawing/2014/main" id="{47E9DF01-0C03-4050-8E88-FD9909DB56E0}"/>
               </a:ext>
             </a:extLst>
           </p:cNvPr>
@@ -5182,7 +5182,7 @@
           <p:cNvPr id="19" name="">
             <a:extLst xmlns:a="http://schemas.openxmlformats.org/drawingml/2006/main">
               <a:ext uri="{FF2B5EF4-FFF2-40B4-BE49-F238E27FC236}">
-                <a16:creationId xmlns:a16="http://schemas.microsoft.com/office/drawing/2014/main" id="{F7B88754-F872-47D3-9C66-9B7AEB66AE01}"/>
+                <a16:creationId xmlns:a16="http://schemas.microsoft.com/office/drawing/2014/main" id="{409997EA-5478-48F1-BA10-12E7E37D8741}"/>
               </a:ext>
             </a:extLst>
           </p:cNvPr>
@@ -5214,7 +5214,7 @@
           <p:cNvPr id="20" name="">
             <a:extLst xmlns:a="http://schemas.openxmlformats.org/drawingml/2006/main">
               <a:ext uri="{FF2B5EF4-FFF2-40B4-BE49-F238E27FC236}">
-                <a16:creationId xmlns:a16="http://schemas.microsoft.com/office/drawing/2014/main" id="{CCE35E8C-9DC7-4237-9C4D-04FE365523F4}"/>
+                <a16:creationId xmlns:a16="http://schemas.microsoft.com/office/drawing/2014/main" id="{21FA648B-D10B-4AC0-B071-232C1E01D4C8}"/>
               </a:ext>
             </a:extLst>
           </p:cNvPr>
@@ -5271,7 +5271,7 @@
           <p:cNvPr id="21" name="">
             <a:extLst xmlns:a="http://schemas.openxmlformats.org/drawingml/2006/main">
               <a:ext uri="{FF2B5EF4-FFF2-40B4-BE49-F238E27FC236}">
-                <a16:creationId xmlns:a16="http://schemas.microsoft.com/office/drawing/2014/main" id="{E95FD7BA-C1DB-49BA-B521-1700BB2B2CA2}"/>
+                <a16:creationId xmlns:a16="http://schemas.microsoft.com/office/drawing/2014/main" id="{64F7665B-D4F1-4CB8-98EE-99FFD064BF6A}"/>
               </a:ext>
             </a:extLst>
           </p:cNvPr>
@@ -5328,7 +5328,7 @@
           <p:cNvPr id="22" name="">
             <a:extLst xmlns:a="http://schemas.openxmlformats.org/drawingml/2006/main">
               <a:ext uri="{FF2B5EF4-FFF2-40B4-BE49-F238E27FC236}">
-                <a16:creationId xmlns:a16="http://schemas.microsoft.com/office/drawing/2014/main" id="{55FA6C15-F950-44E5-B259-95D195210FE0}"/>
+                <a16:creationId xmlns:a16="http://schemas.microsoft.com/office/drawing/2014/main" id="{DA298D4A-6315-432B-B2DF-BAA7C766603D}"/>
               </a:ext>
             </a:extLst>
           </p:cNvPr>
@@ -5383,7 +5383,7 @@
     </p:spTree>
     <p:extLst>
       <p:ext uri="{BB962C8B-B14F-4D97-AF65-F5344CB8AC3E}">
-        <p14:creationId xmlns:p14="http://schemas.microsoft.com/office/powerpoint/2010/main" val="414441217"/>
+        <p14:creationId xmlns:p14="http://schemas.microsoft.com/office/powerpoint/2010/main" val="1714127062"/>
       </p:ext>
     </p:extLst>
   </p:cSld>
@@ -5584,7 +5584,7 @@
           <p:cNvPr id="23" name="">
             <a:extLst xmlns:a="http://schemas.openxmlformats.org/drawingml/2006/main">
               <a:ext uri="{FF2B5EF4-FFF2-40B4-BE49-F238E27FC236}">
-                <a16:creationId xmlns:a16="http://schemas.microsoft.com/office/drawing/2014/main" id="{A7016137-306D-4D8C-80F4-7C317E76357B}"/>
+                <a16:creationId xmlns:a16="http://schemas.microsoft.com/office/drawing/2014/main" id="{5255A62B-B3E8-466C-9D77-CC1E41C7FABF}"/>
               </a:ext>
             </a:extLst>
           </p:cNvPr>
@@ -5616,7 +5616,7 @@
           <p:cNvPr id="2" name="">
             <a:extLst xmlns:a="http://schemas.openxmlformats.org/drawingml/2006/main">
               <a:ext uri="{FF2B5EF4-FFF2-40B4-BE49-F238E27FC236}">
-                <a16:creationId xmlns:a16="http://schemas.microsoft.com/office/drawing/2014/main" id="{6DBA1E21-6639-47E8-B915-240777614A9F}"/>
+                <a16:creationId xmlns:a16="http://schemas.microsoft.com/office/drawing/2014/main" id="{C95BADD4-92D4-4FF1-8063-DADF7BFDF499}"/>
               </a:ext>
             </a:extLst>
           </p:cNvPr>
@@ -5673,7 +5673,7 @@
           <p:cNvPr id="3" name="">
             <a:extLst xmlns:a="http://schemas.openxmlformats.org/drawingml/2006/main">
               <a:ext uri="{FF2B5EF4-FFF2-40B4-BE49-F238E27FC236}">
-                <a16:creationId xmlns:a16="http://schemas.microsoft.com/office/drawing/2014/main" id="{DF4EC398-B11A-4036-86C3-FEE4610D8D6D}"/>
+                <a16:creationId xmlns:a16="http://schemas.microsoft.com/office/drawing/2014/main" id="{520279BB-6222-4C13-9A04-8174419F5218}"/>
               </a:ext>
             </a:extLst>
           </p:cNvPr>
@@ -5705,7 +5705,7 @@
           <p:cNvPr id="4" name="">
             <a:extLst xmlns:a="http://schemas.openxmlformats.org/drawingml/2006/main">
               <a:ext uri="{FF2B5EF4-FFF2-40B4-BE49-F238E27FC236}">
-                <a16:creationId xmlns:a16="http://schemas.microsoft.com/office/drawing/2014/main" id="{1E70930B-26F8-4639-B97C-2CA68FEECD0F}"/>
+                <a16:creationId xmlns:a16="http://schemas.microsoft.com/office/drawing/2014/main" id="{33258AE2-3208-4F9E-BF97-76A6A7E3CE31}"/>
               </a:ext>
             </a:extLst>
           </p:cNvPr>
@@ -5762,7 +5762,7 @@
           <p:cNvPr id="5" name="">
             <a:extLst xmlns:a="http://schemas.openxmlformats.org/drawingml/2006/main">
               <a:ext uri="{FF2B5EF4-FFF2-40B4-BE49-F238E27FC236}">
-                <a16:creationId xmlns:a16="http://schemas.microsoft.com/office/drawing/2014/main" id="{60CF4FC7-8372-4C86-BE6A-3A6C8368BAE1}"/>
+                <a16:creationId xmlns:a16="http://schemas.microsoft.com/office/drawing/2014/main" id="{9BB57F56-8D61-499B-83DD-D0CE55D059D0}"/>
               </a:ext>
             </a:extLst>
           </p:cNvPr>
@@ -5819,7 +5819,7 @@
           <p:cNvPr id="6" name="">
             <a:extLst xmlns:a="http://schemas.openxmlformats.org/drawingml/2006/main">
               <a:ext uri="{FF2B5EF4-FFF2-40B4-BE49-F238E27FC236}">
-                <a16:creationId xmlns:a16="http://schemas.microsoft.com/office/drawing/2014/main" id="{31A63E53-0C1F-4FDC-8B86-F45237783015}"/>
+                <a16:creationId xmlns:a16="http://schemas.microsoft.com/office/drawing/2014/main" id="{68EE44DA-960E-4720-A75F-7B47002D48E3}"/>
               </a:ext>
             </a:extLst>
           </p:cNvPr>
@@ -5876,7 +5876,7 @@
           <p:cNvPr id="7" name="">
             <a:extLst xmlns:a="http://schemas.openxmlformats.org/drawingml/2006/main">
               <a:ext uri="{FF2B5EF4-FFF2-40B4-BE49-F238E27FC236}">
-                <a16:creationId xmlns:a16="http://schemas.microsoft.com/office/drawing/2014/main" id="{401A2740-31AE-4E61-AC37-85508D49165C}"/>
+                <a16:creationId xmlns:a16="http://schemas.microsoft.com/office/drawing/2014/main" id="{DE1CCEB9-33B0-4518-A468-095F28D7B8DD}"/>
               </a:ext>
             </a:extLst>
           </p:cNvPr>
@@ -5908,7 +5908,7 @@
           <p:cNvPr id="8" name="">
             <a:extLst xmlns:a="http://schemas.openxmlformats.org/drawingml/2006/main">
               <a:ext uri="{FF2B5EF4-FFF2-40B4-BE49-F238E27FC236}">
-                <a16:creationId xmlns:a16="http://schemas.microsoft.com/office/drawing/2014/main" id="{88008198-AA67-4EEE-9A36-55B5A46B4E8B}"/>
+                <a16:creationId xmlns:a16="http://schemas.microsoft.com/office/drawing/2014/main" id="{C66446FA-1FF7-427B-969D-35199B4616F5}"/>
               </a:ext>
             </a:extLst>
           </p:cNvPr>
@@ -5965,7 +5965,7 @@
           <p:cNvPr id="9" name="">
             <a:extLst xmlns:a="http://schemas.openxmlformats.org/drawingml/2006/main">
               <a:ext uri="{FF2B5EF4-FFF2-40B4-BE49-F238E27FC236}">
-                <a16:creationId xmlns:a16="http://schemas.microsoft.com/office/drawing/2014/main" id="{AD421127-8BB3-4FAF-98CE-0E6EAD1E9EEB}"/>
+                <a16:creationId xmlns:a16="http://schemas.microsoft.com/office/drawing/2014/main" id="{FCF5D5C7-EE97-48E1-AB01-A27FCFF2BD91}"/>
               </a:ext>
             </a:extLst>
           </p:cNvPr>
@@ -6022,7 +6022,7 @@
           <p:cNvPr id="10" name="">
             <a:extLst xmlns:a="http://schemas.openxmlformats.org/drawingml/2006/main">
               <a:ext uri="{FF2B5EF4-FFF2-40B4-BE49-F238E27FC236}">
-                <a16:creationId xmlns:a16="http://schemas.microsoft.com/office/drawing/2014/main" id="{F8F2D707-BC07-41B3-82F5-386024BA16C8}"/>
+                <a16:creationId xmlns:a16="http://schemas.microsoft.com/office/drawing/2014/main" id="{A4D09830-5AD3-40B7-93BA-0FB5D28BA74D}"/>
               </a:ext>
             </a:extLst>
           </p:cNvPr>
@@ -6056,7 +6056,7 @@
           <p:cNvPr id="11" name="">
             <a:extLst xmlns:a="http://schemas.openxmlformats.org/drawingml/2006/main">
               <a:ext uri="{FF2B5EF4-FFF2-40B4-BE49-F238E27FC236}">
-                <a16:creationId xmlns:a16="http://schemas.microsoft.com/office/drawing/2014/main" id="{1ED33423-4CE6-4883-A827-3EDB2E5B8D2A}"/>
+                <a16:creationId xmlns:a16="http://schemas.microsoft.com/office/drawing/2014/main" id="{0D978A88-196E-4449-9624-488DDD1F158D}"/>
               </a:ext>
             </a:extLst>
           </p:cNvPr>
@@ -6088,7 +6088,7 @@
           <p:cNvPr id="12" name="">
             <a:extLst xmlns:a="http://schemas.openxmlformats.org/drawingml/2006/main">
               <a:ext uri="{FF2B5EF4-FFF2-40B4-BE49-F238E27FC236}">
-                <a16:creationId xmlns:a16="http://schemas.microsoft.com/office/drawing/2014/main" id="{C0FDCA04-88E4-456A-8B4B-A6F8ABDF7027}"/>
+                <a16:creationId xmlns:a16="http://schemas.microsoft.com/office/drawing/2014/main" id="{FE9DC0DB-6E2E-4A14-8B05-97CBB68D4FDC}"/>
               </a:ext>
             </a:extLst>
           </p:cNvPr>
@@ -6145,7 +6145,7 @@
           <p:cNvPr id="13" name="">
             <a:extLst xmlns:a="http://schemas.openxmlformats.org/drawingml/2006/main">
               <a:ext uri="{FF2B5EF4-FFF2-40B4-BE49-F238E27FC236}">
-                <a16:creationId xmlns:a16="http://schemas.microsoft.com/office/drawing/2014/main" id="{7C59E547-9904-4515-BA89-56D402E3A0EA}"/>
+                <a16:creationId xmlns:a16="http://schemas.microsoft.com/office/drawing/2014/main" id="{BA88E16D-4F84-477E-A393-A152C9DA1FF3}"/>
               </a:ext>
             </a:extLst>
           </p:cNvPr>
@@ -6202,7 +6202,7 @@
           <p:cNvPr id="14" name="">
             <a:extLst xmlns:a="http://schemas.openxmlformats.org/drawingml/2006/main">
               <a:ext uri="{FF2B5EF4-FFF2-40B4-BE49-F238E27FC236}">
-                <a16:creationId xmlns:a16="http://schemas.microsoft.com/office/drawing/2014/main" id="{128661B4-BE67-4A4F-BB5A-7E17B21A5C6E}"/>
+                <a16:creationId xmlns:a16="http://schemas.microsoft.com/office/drawing/2014/main" id="{57334A58-0B6E-4C86-A1F1-5206420A9DC5}"/>
               </a:ext>
             </a:extLst>
           </p:cNvPr>
@@ -6236,7 +6236,7 @@
           <p:cNvPr id="15" name="">
             <a:extLst xmlns:a="http://schemas.openxmlformats.org/drawingml/2006/main">
               <a:ext uri="{FF2B5EF4-FFF2-40B4-BE49-F238E27FC236}">
-                <a16:creationId xmlns:a16="http://schemas.microsoft.com/office/drawing/2014/main" id="{099A3360-A0AB-49DC-8249-582B1F50FFD6}"/>
+                <a16:creationId xmlns:a16="http://schemas.microsoft.com/office/drawing/2014/main" id="{192BF03E-593C-40E6-A5CA-E4B789FA9120}"/>
               </a:ext>
             </a:extLst>
           </p:cNvPr>
@@ -6268,7 +6268,7 @@
           <p:cNvPr id="16" name="">
             <a:extLst xmlns:a="http://schemas.openxmlformats.org/drawingml/2006/main">
               <a:ext uri="{FF2B5EF4-FFF2-40B4-BE49-F238E27FC236}">
-                <a16:creationId xmlns:a16="http://schemas.microsoft.com/office/drawing/2014/main" id="{F2004217-3D67-47CD-B91A-0860A5BCA310}"/>
+                <a16:creationId xmlns:a16="http://schemas.microsoft.com/office/drawing/2014/main" id="{8FD66EE0-FF05-426D-876C-93E6E33034A1}"/>
               </a:ext>
             </a:extLst>
           </p:cNvPr>
@@ -6325,7 +6325,7 @@
           <p:cNvPr id="17" name="">
             <a:extLst xmlns:a="http://schemas.openxmlformats.org/drawingml/2006/main">
               <a:ext uri="{FF2B5EF4-FFF2-40B4-BE49-F238E27FC236}">
-                <a16:creationId xmlns:a16="http://schemas.microsoft.com/office/drawing/2014/main" id="{76C38EEA-7CC7-4EF3-84E4-A986A3A6F7CD}"/>
+                <a16:creationId xmlns:a16="http://schemas.microsoft.com/office/drawing/2014/main" id="{046560DB-BFF7-401D-B808-6856A87F7E5B}"/>
               </a:ext>
             </a:extLst>
           </p:cNvPr>
@@ -6382,7 +6382,7 @@
           <p:cNvPr id="18" name="">
             <a:extLst xmlns:a="http://schemas.openxmlformats.org/drawingml/2006/main">
               <a:ext uri="{FF2B5EF4-FFF2-40B4-BE49-F238E27FC236}">
-                <a16:creationId xmlns:a16="http://schemas.microsoft.com/office/drawing/2014/main" id="{E9F47C75-5F4C-427B-8E90-192AC40D4388}"/>
+                <a16:creationId xmlns:a16="http://schemas.microsoft.com/office/drawing/2014/main" id="{4956A766-F19D-41F3-8E91-5D04965A2F48}"/>
               </a:ext>
             </a:extLst>
           </p:cNvPr>
@@ -6416,7 +6416,7 @@
           <p:cNvPr id="19" name="">
             <a:extLst xmlns:a="http://schemas.openxmlformats.org/drawingml/2006/main">
               <a:ext uri="{FF2B5EF4-FFF2-40B4-BE49-F238E27FC236}">
-                <a16:creationId xmlns:a16="http://schemas.microsoft.com/office/drawing/2014/main" id="{C43D5292-E16B-4F45-A5F5-4C64CA10C20F}"/>
+                <a16:creationId xmlns:a16="http://schemas.microsoft.com/office/drawing/2014/main" id="{5126E740-446D-4C5D-A8C4-465F704F7A27}"/>
               </a:ext>
             </a:extLst>
           </p:cNvPr>
@@ -6448,7 +6448,7 @@
           <p:cNvPr id="20" name="">
             <a:extLst xmlns:a="http://schemas.openxmlformats.org/drawingml/2006/main">
               <a:ext uri="{FF2B5EF4-FFF2-40B4-BE49-F238E27FC236}">
-                <a16:creationId xmlns:a16="http://schemas.microsoft.com/office/drawing/2014/main" id="{0FAE1845-77C1-458D-98DD-2ED6EB4C5572}"/>
+                <a16:creationId xmlns:a16="http://schemas.microsoft.com/office/drawing/2014/main" id="{DADEF9C2-2D76-45CB-8802-E3E9AA793E57}"/>
               </a:ext>
             </a:extLst>
           </p:cNvPr>
@@ -6505,7 +6505,7 @@
           <p:cNvPr id="21" name="">
             <a:extLst xmlns:a="http://schemas.openxmlformats.org/drawingml/2006/main">
               <a:ext uri="{FF2B5EF4-FFF2-40B4-BE49-F238E27FC236}">
-                <a16:creationId xmlns:a16="http://schemas.microsoft.com/office/drawing/2014/main" id="{07FB4E82-508F-4AAD-BEFE-584E1B1D1F97}"/>
+                <a16:creationId xmlns:a16="http://schemas.microsoft.com/office/drawing/2014/main" id="{5BE00601-BDCA-4DCC-AD7A-8575A94BB94A}"/>
               </a:ext>
             </a:extLst>
           </p:cNvPr>
@@ -6562,7 +6562,7 @@
           <p:cNvPr id="22" name="">
             <a:extLst xmlns:a="http://schemas.openxmlformats.org/drawingml/2006/main">
               <a:ext uri="{FF2B5EF4-FFF2-40B4-BE49-F238E27FC236}">
-                <a16:creationId xmlns:a16="http://schemas.microsoft.com/office/drawing/2014/main" id="{627B4513-AA86-4061-969E-D4CFC2A6DACD}"/>
+                <a16:creationId xmlns:a16="http://schemas.microsoft.com/office/drawing/2014/main" id="{0941AE80-64AF-4240-ADCC-6EE62173E35B}"/>
               </a:ext>
             </a:extLst>
           </p:cNvPr>
@@ -6617,7 +6617,7 @@
     </p:spTree>
     <p:extLst>
       <p:ext uri="{BB962C8B-B14F-4D97-AF65-F5344CB8AC3E}">
-        <p14:creationId xmlns:p14="http://schemas.microsoft.com/office/powerpoint/2010/main" val="1569015188"/>
+        <p14:creationId xmlns:p14="http://schemas.microsoft.com/office/powerpoint/2010/main" val="910474061"/>
       </p:ext>
     </p:extLst>
   </p:cSld>
@@ -6818,7 +6818,7 @@
           <p:cNvPr id="16" name="">
             <a:extLst xmlns:a="http://schemas.openxmlformats.org/drawingml/2006/main">
               <a:ext uri="{FF2B5EF4-FFF2-40B4-BE49-F238E27FC236}">
-                <a16:creationId xmlns:a16="http://schemas.microsoft.com/office/drawing/2014/main" id="{9A37D67C-231A-4E29-B863-6D91A171B45C}"/>
+                <a16:creationId xmlns:a16="http://schemas.microsoft.com/office/drawing/2014/main" id="{D9AD7635-6E5F-474E-9A32-0E99A368CACA}"/>
               </a:ext>
             </a:extLst>
           </p:cNvPr>
@@ -6850,7 +6850,7 @@
           <p:cNvPr id="2" name="">
             <a:extLst xmlns:a="http://schemas.openxmlformats.org/drawingml/2006/main">
               <a:ext uri="{FF2B5EF4-FFF2-40B4-BE49-F238E27FC236}">
-                <a16:creationId xmlns:a16="http://schemas.microsoft.com/office/drawing/2014/main" id="{AC46EEBF-5080-4445-B9CA-A26BCBE54322}"/>
+                <a16:creationId xmlns:a16="http://schemas.microsoft.com/office/drawing/2014/main" id="{C963EB0A-4FD2-494C-8460-DED3C4753B11}"/>
               </a:ext>
             </a:extLst>
           </p:cNvPr>
@@ -6907,7 +6907,7 @@
           <p:cNvPr id="3" name="">
             <a:extLst xmlns:a="http://schemas.openxmlformats.org/drawingml/2006/main">
               <a:ext uri="{FF2B5EF4-FFF2-40B4-BE49-F238E27FC236}">
-                <a16:creationId xmlns:a16="http://schemas.microsoft.com/office/drawing/2014/main" id="{414EA2B4-84FB-42C2-A479-B79E1708129F}"/>
+                <a16:creationId xmlns:a16="http://schemas.microsoft.com/office/drawing/2014/main" id="{334E7F0C-A2B2-41E8-91B3-8C54A28190D8}"/>
               </a:ext>
             </a:extLst>
           </p:cNvPr>
@@ -6939,7 +6939,7 @@
           <p:cNvPr id="4" name="">
             <a:extLst xmlns:a="http://schemas.openxmlformats.org/drawingml/2006/main">
               <a:ext uri="{FF2B5EF4-FFF2-40B4-BE49-F238E27FC236}">
-                <a16:creationId xmlns:a16="http://schemas.microsoft.com/office/drawing/2014/main" id="{54A630B3-7152-49F8-AC6A-6CA7525B13CB}"/>
+                <a16:creationId xmlns:a16="http://schemas.microsoft.com/office/drawing/2014/main" id="{BAF19719-3932-499F-B25C-5A641557C8F5}"/>
               </a:ext>
             </a:extLst>
           </p:cNvPr>
@@ -6996,7 +6996,7 @@
           <p:cNvPr id="5" name="">
             <a:extLst xmlns:a="http://schemas.openxmlformats.org/drawingml/2006/main">
               <a:ext uri="{FF2B5EF4-FFF2-40B4-BE49-F238E27FC236}">
-                <a16:creationId xmlns:a16="http://schemas.microsoft.com/office/drawing/2014/main" id="{CB5CBDD0-997C-42C6-A01D-2C6606FAE98A}"/>
+                <a16:creationId xmlns:a16="http://schemas.microsoft.com/office/drawing/2014/main" id="{A68731F3-7C99-4ADE-A206-165BC0A007C0}"/>
               </a:ext>
             </a:extLst>
           </p:cNvPr>
@@ -7053,7 +7053,7 @@
           <p:cNvPr id="6" name="">
             <a:extLst xmlns:a="http://schemas.openxmlformats.org/drawingml/2006/main">
               <a:ext uri="{FF2B5EF4-FFF2-40B4-BE49-F238E27FC236}">
-                <a16:creationId xmlns:a16="http://schemas.microsoft.com/office/drawing/2014/main" id="{52B16997-9146-414A-B309-2F3398F00539}"/>
+                <a16:creationId xmlns:a16="http://schemas.microsoft.com/office/drawing/2014/main" id="{A39A5170-F022-4C0F-BF26-787328D89A2F}"/>
               </a:ext>
             </a:extLst>
           </p:cNvPr>
@@ -7110,7 +7110,7 @@
           <p:cNvPr id="7" name="">
             <a:extLst xmlns:a="http://schemas.openxmlformats.org/drawingml/2006/main">
               <a:ext uri="{FF2B5EF4-FFF2-40B4-BE49-F238E27FC236}">
-                <a16:creationId xmlns:a16="http://schemas.microsoft.com/office/drawing/2014/main" id="{61CB8C23-88F0-4277-9FB3-320469849B00}"/>
+                <a16:creationId xmlns:a16="http://schemas.microsoft.com/office/drawing/2014/main" id="{9B313CB4-6A58-4777-A647-072B708856C8}"/>
               </a:ext>
             </a:extLst>
           </p:cNvPr>
@@ -7142,7 +7142,7 @@
           <p:cNvPr id="8" name="">
             <a:extLst xmlns:a="http://schemas.openxmlformats.org/drawingml/2006/main">
               <a:ext uri="{FF2B5EF4-FFF2-40B4-BE49-F238E27FC236}">
-                <a16:creationId xmlns:a16="http://schemas.microsoft.com/office/drawing/2014/main" id="{DC296A2C-7125-40F8-BF60-0CD3CE7BC014}"/>
+                <a16:creationId xmlns:a16="http://schemas.microsoft.com/office/drawing/2014/main" id="{27662148-E19D-4888-996C-0E009FA47B4F}"/>
               </a:ext>
             </a:extLst>
           </p:cNvPr>
@@ -7199,7 +7199,7 @@
           <p:cNvPr id="9" name="">
             <a:extLst xmlns:a="http://schemas.openxmlformats.org/drawingml/2006/main">
               <a:ext uri="{FF2B5EF4-FFF2-40B4-BE49-F238E27FC236}">
-                <a16:creationId xmlns:a16="http://schemas.microsoft.com/office/drawing/2014/main" id="{98D4D383-A03F-49EC-AC00-E196EC3CA216}"/>
+                <a16:creationId xmlns:a16="http://schemas.microsoft.com/office/drawing/2014/main" id="{E252E385-C3F5-4FEE-A435-CF548093F2E8}"/>
               </a:ext>
             </a:extLst>
           </p:cNvPr>
@@ -7256,7 +7256,7 @@
           <p:cNvPr id="10" name="">
             <a:extLst xmlns:a="http://schemas.openxmlformats.org/drawingml/2006/main">
               <a:ext uri="{FF2B5EF4-FFF2-40B4-BE49-F238E27FC236}">
-                <a16:creationId xmlns:a16="http://schemas.microsoft.com/office/drawing/2014/main" id="{F20D8757-9FF8-462A-82C6-EA37C72A4378}"/>
+                <a16:creationId xmlns:a16="http://schemas.microsoft.com/office/drawing/2014/main" id="{666FBAFB-561A-4F06-BFC0-FA1AACC52098}"/>
               </a:ext>
             </a:extLst>
           </p:cNvPr>
@@ -7313,7 +7313,7 @@
           <p:cNvPr id="11" name="">
             <a:extLst xmlns:a="http://schemas.openxmlformats.org/drawingml/2006/main">
               <a:ext uri="{FF2B5EF4-FFF2-40B4-BE49-F238E27FC236}">
-                <a16:creationId xmlns:a16="http://schemas.microsoft.com/office/drawing/2014/main" id="{3BCF8AF8-0B86-453C-AF51-81DC9E8362BC}"/>
+                <a16:creationId xmlns:a16="http://schemas.microsoft.com/office/drawing/2014/main" id="{5A66009C-692E-4E9E-B690-AD399378676F}"/>
               </a:ext>
             </a:extLst>
           </p:cNvPr>
@@ -7345,7 +7345,7 @@
           <p:cNvPr id="12" name="">
             <a:extLst xmlns:a="http://schemas.openxmlformats.org/drawingml/2006/main">
               <a:ext uri="{FF2B5EF4-FFF2-40B4-BE49-F238E27FC236}">
-                <a16:creationId xmlns:a16="http://schemas.microsoft.com/office/drawing/2014/main" id="{B0A672B9-4E5D-447D-973C-BF2FF8CD9967}"/>
+                <a16:creationId xmlns:a16="http://schemas.microsoft.com/office/drawing/2014/main" id="{84E1FE2D-90B7-4281-B9A8-E101347A5F8F}"/>
               </a:ext>
             </a:extLst>
           </p:cNvPr>
@@ -7402,7 +7402,7 @@
           <p:cNvPr id="13" name="">
             <a:extLst xmlns:a="http://schemas.openxmlformats.org/drawingml/2006/main">
               <a:ext uri="{FF2B5EF4-FFF2-40B4-BE49-F238E27FC236}">
-                <a16:creationId xmlns:a16="http://schemas.microsoft.com/office/drawing/2014/main" id="{2480A31B-9A15-42A6-9476-13F502C8D240}"/>
+                <a16:creationId xmlns:a16="http://schemas.microsoft.com/office/drawing/2014/main" id="{C1538AFD-637A-464A-BF62-D5D4356974DE}"/>
               </a:ext>
             </a:extLst>
           </p:cNvPr>
@@ -7459,7 +7459,7 @@
           <p:cNvPr id="14" name="">
             <a:extLst xmlns:a="http://schemas.openxmlformats.org/drawingml/2006/main">
               <a:ext uri="{FF2B5EF4-FFF2-40B4-BE49-F238E27FC236}">
-                <a16:creationId xmlns:a16="http://schemas.microsoft.com/office/drawing/2014/main" id="{30D069F7-26CF-4759-8EBF-51DCE35216B1}"/>
+                <a16:creationId xmlns:a16="http://schemas.microsoft.com/office/drawing/2014/main" id="{1CD46680-E9FE-4D1D-8130-BAD0141D39AC}"/>
               </a:ext>
             </a:extLst>
           </p:cNvPr>
@@ -7516,7 +7516,7 @@
           <p:cNvPr id="15" name="">
             <a:extLst xmlns:a="http://schemas.openxmlformats.org/drawingml/2006/main">
               <a:ext uri="{FF2B5EF4-FFF2-40B4-BE49-F238E27FC236}">
-                <a16:creationId xmlns:a16="http://schemas.microsoft.com/office/drawing/2014/main" id="{CAB0621A-27CF-46AD-BBF3-A9895740F821}"/>
+                <a16:creationId xmlns:a16="http://schemas.microsoft.com/office/drawing/2014/main" id="{49890244-0D62-4BA1-8BF5-E845D6DBBC9E}"/>
               </a:ext>
             </a:extLst>
           </p:cNvPr>
@@ -7571,7 +7571,7 @@
     </p:spTree>
     <p:extLst>
       <p:ext uri="{BB962C8B-B14F-4D97-AF65-F5344CB8AC3E}">
-        <p14:creationId xmlns:p14="http://schemas.microsoft.com/office/powerpoint/2010/main" val="1727871302"/>
+        <p14:creationId xmlns:p14="http://schemas.microsoft.com/office/powerpoint/2010/main" val="2079093301"/>
       </p:ext>
     </p:extLst>
   </p:cSld>
@@ -7772,7 +7772,7 @@
           <p:cNvPr id="23" name="">
             <a:extLst xmlns:a="http://schemas.openxmlformats.org/drawingml/2006/main">
               <a:ext uri="{FF2B5EF4-FFF2-40B4-BE49-F238E27FC236}">
-                <a16:creationId xmlns:a16="http://schemas.microsoft.com/office/drawing/2014/main" id="{F864CEDD-74CE-4417-B6A8-D35CB11AC72A}"/>
+                <a16:creationId xmlns:a16="http://schemas.microsoft.com/office/drawing/2014/main" id="{BDDE2217-0E7F-4BA0-83C5-B146633D34DC}"/>
               </a:ext>
             </a:extLst>
           </p:cNvPr>
@@ -7804,7 +7804,7 @@
           <p:cNvPr id="2" name="">
             <a:extLst xmlns:a="http://schemas.openxmlformats.org/drawingml/2006/main">
               <a:ext uri="{FF2B5EF4-FFF2-40B4-BE49-F238E27FC236}">
-                <a16:creationId xmlns:a16="http://schemas.microsoft.com/office/drawing/2014/main" id="{1EFDD8FC-96C0-4E90-85CC-C27126C3FABA}"/>
+                <a16:creationId xmlns:a16="http://schemas.microsoft.com/office/drawing/2014/main" id="{9F5F8962-CFB3-4814-912C-C9160BECC01F}"/>
               </a:ext>
             </a:extLst>
           </p:cNvPr>
@@ -7861,7 +7861,7 @@
           <p:cNvPr id="3" name="">
             <a:extLst xmlns:a="http://schemas.openxmlformats.org/drawingml/2006/main">
               <a:ext uri="{FF2B5EF4-FFF2-40B4-BE49-F238E27FC236}">
-                <a16:creationId xmlns:a16="http://schemas.microsoft.com/office/drawing/2014/main" id="{348A9AF8-C792-4A67-A1FD-035834881DA0}"/>
+                <a16:creationId xmlns:a16="http://schemas.microsoft.com/office/drawing/2014/main" id="{D7097B5D-23C5-484A-AC0E-0390CF6601E5}"/>
               </a:ext>
             </a:extLst>
           </p:cNvPr>
@@ -7893,7 +7893,7 @@
           <p:cNvPr id="4" name="">
             <a:extLst xmlns:a="http://schemas.openxmlformats.org/drawingml/2006/main">
               <a:ext uri="{FF2B5EF4-FFF2-40B4-BE49-F238E27FC236}">
-                <a16:creationId xmlns:a16="http://schemas.microsoft.com/office/drawing/2014/main" id="{59EDD691-07D1-4EDC-A0A0-F49201277252}"/>
+                <a16:creationId xmlns:a16="http://schemas.microsoft.com/office/drawing/2014/main" id="{BBE7D53B-873A-4096-92AC-480859884D8D}"/>
               </a:ext>
             </a:extLst>
           </p:cNvPr>
@@ -7950,7 +7950,7 @@
           <p:cNvPr id="5" name="">
             <a:extLst xmlns:a="http://schemas.openxmlformats.org/drawingml/2006/main">
               <a:ext uri="{FF2B5EF4-FFF2-40B4-BE49-F238E27FC236}">
-                <a16:creationId xmlns:a16="http://schemas.microsoft.com/office/drawing/2014/main" id="{2D17794C-4C29-44A1-B404-B2A58C651995}"/>
+                <a16:creationId xmlns:a16="http://schemas.microsoft.com/office/drawing/2014/main" id="{6378D2D7-8848-40C6-BAC2-E68EF2863A0D}"/>
               </a:ext>
             </a:extLst>
           </p:cNvPr>
@@ -8007,7 +8007,7 @@
           <p:cNvPr id="6" name="">
             <a:extLst xmlns:a="http://schemas.openxmlformats.org/drawingml/2006/main">
               <a:ext uri="{FF2B5EF4-FFF2-40B4-BE49-F238E27FC236}">
-                <a16:creationId xmlns:a16="http://schemas.microsoft.com/office/drawing/2014/main" id="{ADC3BFDF-A627-4BE4-AA75-BB38FD8230F7}"/>
+                <a16:creationId xmlns:a16="http://schemas.microsoft.com/office/drawing/2014/main" id="{1C4B28AF-09DD-4F45-A603-CE57E60392B4}"/>
               </a:ext>
             </a:extLst>
           </p:cNvPr>
@@ -8064,7 +8064,7 @@
           <p:cNvPr id="7" name="">
             <a:extLst xmlns:a="http://schemas.openxmlformats.org/drawingml/2006/main">
               <a:ext uri="{FF2B5EF4-FFF2-40B4-BE49-F238E27FC236}">
-                <a16:creationId xmlns:a16="http://schemas.microsoft.com/office/drawing/2014/main" id="{327086A7-A416-4326-8834-448B714570B3}"/>
+                <a16:creationId xmlns:a16="http://schemas.microsoft.com/office/drawing/2014/main" id="{54347AB1-3CAC-42B4-A1B1-30AB49D2D165}"/>
               </a:ext>
             </a:extLst>
           </p:cNvPr>
@@ -8096,7 +8096,7 @@
           <p:cNvPr id="8" name="">
             <a:extLst xmlns:a="http://schemas.openxmlformats.org/drawingml/2006/main">
               <a:ext uri="{FF2B5EF4-FFF2-40B4-BE49-F238E27FC236}">
-                <a16:creationId xmlns:a16="http://schemas.microsoft.com/office/drawing/2014/main" id="{75AD87ED-E211-4DE9-AAEE-8F3D85B5AFEE}"/>
+                <a16:creationId xmlns:a16="http://schemas.microsoft.com/office/drawing/2014/main" id="{339C43AA-4B04-40AC-B580-27CA95ABC9E1}"/>
               </a:ext>
             </a:extLst>
           </p:cNvPr>
@@ -8153,7 +8153,7 @@
           <p:cNvPr id="9" name="">
             <a:extLst xmlns:a="http://schemas.openxmlformats.org/drawingml/2006/main">
               <a:ext uri="{FF2B5EF4-FFF2-40B4-BE49-F238E27FC236}">
-                <a16:creationId xmlns:a16="http://schemas.microsoft.com/office/drawing/2014/main" id="{075D57FF-D845-4FF4-B47E-03AC8ABB996B}"/>
+                <a16:creationId xmlns:a16="http://schemas.microsoft.com/office/drawing/2014/main" id="{52A90089-05BD-40B4-924D-AE01254A03C9}"/>
               </a:ext>
             </a:extLst>
           </p:cNvPr>
@@ -8210,19 +8210,19 @@
           <p:cNvPr id="10" name="">
             <a:extLst xmlns:a="http://schemas.openxmlformats.org/drawingml/2006/main">
               <a:ext uri="{FF2B5EF4-FFF2-40B4-BE49-F238E27FC236}">
-                <a16:creationId xmlns:a16="http://schemas.microsoft.com/office/drawing/2014/main" id="{E05FFE2D-897A-45DC-95AA-D932114C8D7A}"/>
-              </a:ext>
-            </a:extLst>
-          </p:cNvPr>
-          <p:cNvSpPr>
-            <a:spLocks xmlns:a="http://schemas.openxmlformats.org/drawingml/2006/main" noGrp="1"/>
-          </p:cNvSpPr>
-          <p:nvPr/>
-        </p:nvSpPr>
-        <p:spPr>
-          <a:xfrm xmlns:a="http://schemas.openxmlformats.org/drawingml/2006/main">
-            <a:off x="914400" y="1257300"/>
-            <a:ext cx="10363200" cy="781050"/>
+                <a16:creationId xmlns:a16="http://schemas.microsoft.com/office/drawing/2014/main" id="{C0F64901-8409-4B80-8C95-D172852735EB}"/>
+              </a:ext>
+            </a:extLst>
+          </p:cNvPr>
+          <p:cNvSpPr>
+            <a:spLocks xmlns:a="http://schemas.openxmlformats.org/drawingml/2006/main" noGrp="1"/>
+          </p:cNvSpPr>
+          <p:nvPr/>
+        </p:nvSpPr>
+        <p:spPr>
+          <a:xfrm xmlns:a="http://schemas.openxmlformats.org/drawingml/2006/main">
+            <a:off x="857250" y="1219200"/>
+            <a:ext cx="10477500" cy="742950"/>
           </a:xfrm>
           <a:prstGeom xmlns:a="http://schemas.openxmlformats.org/drawingml/2006/main" prst="rect">
             <a:avLst/>
@@ -8239,7 +8239,7 @@
           <a:lstStyle xmlns:a="http://schemas.openxmlformats.org/drawingml/2006/main"/>
           <a:p xmlns:a="http://schemas.openxmlformats.org/drawingml/2006/main">
             <a:pPr algn="ctr">
-              <a:defRPr sz="2175" b="1">
+              <a:defRPr sz="2100" b="1">
                 <a:solidFill>
                   <a:srgbClr val="17253A"/>
                 </a:solidFill>
@@ -8249,7 +8249,7 @@
               </a:defRPr>
             </a:pPr>
             <a:r>
-              <a:rPr sz="2175" b="1">
+              <a:rPr sz="2100" b="1">
                 <a:solidFill>
                   <a:srgbClr val="17253A"/>
                 </a:solidFill>
@@ -8267,28 +8267,30 @@
           <p:cNvPr id="11" name="">
             <a:extLst xmlns:a="http://schemas.openxmlformats.org/drawingml/2006/main">
               <a:ext uri="{FF2B5EF4-FFF2-40B4-BE49-F238E27FC236}">
-                <a16:creationId xmlns:a16="http://schemas.microsoft.com/office/drawing/2014/main" id="{AD55947E-9D79-4A40-8EE2-33C0F00D174A}"/>
-              </a:ext>
-            </a:extLst>
-          </p:cNvPr>
-          <p:cNvSpPr>
-            <a:spLocks xmlns:a="http://schemas.openxmlformats.org/drawingml/2006/main" noGrp="1"/>
-          </p:cNvSpPr>
-          <p:nvPr/>
-        </p:nvSpPr>
-        <p:spPr>
-          <a:xfrm xmlns:a="http://schemas.openxmlformats.org/drawingml/2006/main">
-            <a:off x="1000125" y="2247900"/>
-            <a:ext cx="476250" cy="476250"/>
-          </a:xfrm>
-          <a:prstGeom xmlns:a="http://schemas.openxmlformats.org/drawingml/2006/main" prst="ellipse">
+                <a16:creationId xmlns:a16="http://schemas.microsoft.com/office/drawing/2014/main" id="{30DC9DA6-EE01-4E6D-ABCD-9E507316DA43}"/>
+              </a:ext>
+            </a:extLst>
+          </p:cNvPr>
+          <p:cNvSpPr>
+            <a:spLocks xmlns:a="http://schemas.openxmlformats.org/drawingml/2006/main" noGrp="1"/>
+          </p:cNvSpPr>
+          <p:nvPr/>
+        </p:nvSpPr>
+        <p:spPr>
+          <a:xfrm xmlns:a="http://schemas.openxmlformats.org/drawingml/2006/main">
+            <a:off x="971550" y="2124075"/>
+            <a:ext cx="38100" cy="3524250"/>
+          </a:xfrm>
+          <a:prstGeom xmlns:a="http://schemas.openxmlformats.org/drawingml/2006/main" prst="rect">
             <a:avLst/>
           </a:prstGeom>
           <a:solidFill xmlns:a="http://schemas.openxmlformats.org/drawingml/2006/main">
-            <a:srgbClr val="18324A"/>
+            <a:srgbClr val="2C6E73"/>
           </a:solidFill>
           <a:ln xmlns:a="http://schemas.openxmlformats.org/drawingml/2006/main" w="0">
-            <a:noFill/>
+            <a:solidFill>
+              <a:srgbClr val="2C6E73"/>
+            </a:solidFill>
           </a:ln>
         </p:spPr>
       </p:sp>
@@ -8297,19 +8299,19 @@
           <p:cNvPr id="12" name="">
             <a:extLst xmlns:a="http://schemas.openxmlformats.org/drawingml/2006/main">
               <a:ext uri="{FF2B5EF4-FFF2-40B4-BE49-F238E27FC236}">
-                <a16:creationId xmlns:a16="http://schemas.microsoft.com/office/drawing/2014/main" id="{65FAD665-94A9-4F4B-B5DD-3CC8E2A59AFF}"/>
-              </a:ext>
-            </a:extLst>
-          </p:cNvPr>
-          <p:cNvSpPr>
-            <a:spLocks xmlns:a="http://schemas.openxmlformats.org/drawingml/2006/main" noGrp="1"/>
-          </p:cNvSpPr>
-          <p:nvPr/>
-        </p:nvSpPr>
-        <p:spPr>
-          <a:xfrm xmlns:a="http://schemas.openxmlformats.org/drawingml/2006/main">
-            <a:off x="1000125" y="2276475"/>
-            <a:ext cx="476250" cy="419100"/>
+                <a16:creationId xmlns:a16="http://schemas.microsoft.com/office/drawing/2014/main" id="{6843E76D-7792-4F3A-8334-D58C079DA462}"/>
+              </a:ext>
+            </a:extLst>
+          </p:cNvPr>
+          <p:cNvSpPr>
+            <a:spLocks xmlns:a="http://schemas.openxmlformats.org/drawingml/2006/main" noGrp="1"/>
+          </p:cNvSpPr>
+          <p:nvPr/>
+        </p:nvSpPr>
+        <p:spPr>
+          <a:xfrm xmlns:a="http://schemas.openxmlformats.org/drawingml/2006/main">
+            <a:off x="1162050" y="2200275"/>
+            <a:ext cx="400050" cy="400050"/>
           </a:xfrm>
           <a:prstGeom xmlns:a="http://schemas.openxmlformats.org/drawingml/2006/main" prst="rect">
             <a:avLst/>
@@ -8326,9 +8328,9 @@
           <a:lstStyle xmlns:a="http://schemas.openxmlformats.org/drawingml/2006/main"/>
           <a:p xmlns:a="http://schemas.openxmlformats.org/drawingml/2006/main">
             <a:pPr algn="ctr">
-              <a:defRPr sz="1350" b="1">
-                <a:solidFill>
-                  <a:srgbClr val="FFFFFF"/>
+              <a:defRPr sz="1125" b="1">
+                <a:solidFill>
+                  <a:srgbClr val="2C6E73"/>
                 </a:solidFill>
                 <a:latin typeface="Arial"/>
                 <a:ea typeface="Arial"/>
@@ -8336,9 +8338,9 @@
               </a:defRPr>
             </a:pPr>
             <a:r>
-              <a:rPr sz="1350" b="1">
-                <a:solidFill>
-                  <a:srgbClr val="FFFFFF"/>
+              <a:rPr sz="1125" b="1">
+                <a:solidFill>
+                  <a:srgbClr val="2C6E73"/>
                 </a:solidFill>
                 <a:latin typeface="Arial"/>
                 <a:ea typeface="Arial"/>
@@ -8354,19 +8356,19 @@
           <p:cNvPr id="13" name="">
             <a:extLst xmlns:a="http://schemas.openxmlformats.org/drawingml/2006/main">
               <a:ext uri="{FF2B5EF4-FFF2-40B4-BE49-F238E27FC236}">
-                <a16:creationId xmlns:a16="http://schemas.microsoft.com/office/drawing/2014/main" id="{8BBA1445-89E2-4458-BBA5-88E6EBFEF7C7}"/>
-              </a:ext>
-            </a:extLst>
-          </p:cNvPr>
-          <p:cNvSpPr>
-            <a:spLocks xmlns:a="http://schemas.openxmlformats.org/drawingml/2006/main" noGrp="1"/>
-          </p:cNvSpPr>
-          <p:nvPr/>
-        </p:nvSpPr>
-        <p:spPr>
-          <a:xfrm xmlns:a="http://schemas.openxmlformats.org/drawingml/2006/main">
-            <a:off x="1714500" y="2181225"/>
-            <a:ext cx="9429750" cy="609600"/>
+                <a16:creationId xmlns:a16="http://schemas.microsoft.com/office/drawing/2014/main" id="{314F54DA-1FC2-45FE-8D97-A92CECF2F73B}"/>
+              </a:ext>
+            </a:extLst>
+          </p:cNvPr>
+          <p:cNvSpPr>
+            <a:spLocks xmlns:a="http://schemas.openxmlformats.org/drawingml/2006/main" noGrp="1"/>
+          </p:cNvSpPr>
+          <p:nvPr/>
+        </p:nvSpPr>
+        <p:spPr>
+          <a:xfrm xmlns:a="http://schemas.openxmlformats.org/drawingml/2006/main">
+            <a:off x="1714500" y="2114550"/>
+            <a:ext cx="9525000" cy="809625"/>
           </a:xfrm>
           <a:prstGeom xmlns:a="http://schemas.openxmlformats.org/drawingml/2006/main" prst="rect">
             <a:avLst/>
@@ -8383,7 +8385,7 @@
           <a:lstStyle xmlns:a="http://schemas.openxmlformats.org/drawingml/2006/main"/>
           <a:p xmlns:a="http://schemas.openxmlformats.org/drawingml/2006/main">
             <a:pPr algn="l">
-              <a:defRPr sz="1500" b="0">
+              <a:defRPr sz="1725" b="0">
                 <a:solidFill>
                   <a:srgbClr val="17253A"/>
                 </a:solidFill>
@@ -8393,7 +8395,7 @@
               </a:defRPr>
             </a:pPr>
             <a:r>
-              <a:rPr sz="1500" b="0">
+              <a:rPr sz="1725" b="0">
                 <a:solidFill>
                   <a:srgbClr val="17253A"/>
                 </a:solidFill>
@@ -8401,7 +8403,7 @@
                 <a:ea typeface="Arial"/>
                 <a:cs typeface="Arial"/>
               </a:rPr>
-              <a:t>Identify the structure: Read the whole problem and mark the question and useful information.</a:t>
+              <a:t>48 boxes × 125 books</a:t>
             </a:r>
           </a:p>
         </p:txBody>
@@ -8411,28 +8413,30 @@
           <p:cNvPr id="14" name="">
             <a:extLst xmlns:a="http://schemas.openxmlformats.org/drawingml/2006/main">
               <a:ext uri="{FF2B5EF4-FFF2-40B4-BE49-F238E27FC236}">
-                <a16:creationId xmlns:a16="http://schemas.microsoft.com/office/drawing/2014/main" id="{DA291944-489D-45BE-8C31-14D52BCB30C3}"/>
-              </a:ext>
-            </a:extLst>
-          </p:cNvPr>
-          <p:cNvSpPr>
-            <a:spLocks xmlns:a="http://schemas.openxmlformats.org/drawingml/2006/main" noGrp="1"/>
-          </p:cNvSpPr>
-          <p:nvPr/>
-        </p:nvSpPr>
-        <p:spPr>
-          <a:xfrm xmlns:a="http://schemas.openxmlformats.org/drawingml/2006/main">
-            <a:off x="1000125" y="2990850"/>
-            <a:ext cx="476250" cy="476250"/>
-          </a:xfrm>
-          <a:prstGeom xmlns:a="http://schemas.openxmlformats.org/drawingml/2006/main" prst="ellipse">
+                <a16:creationId xmlns:a16="http://schemas.microsoft.com/office/drawing/2014/main" id="{E2E6A30F-5C34-407A-9C80-96D04BBE82DF}"/>
+              </a:ext>
+            </a:extLst>
+          </p:cNvPr>
+          <p:cNvSpPr>
+            <a:spLocks xmlns:a="http://schemas.openxmlformats.org/drawingml/2006/main" noGrp="1"/>
+          </p:cNvSpPr>
+          <p:nvPr/>
+        </p:nvSpPr>
+        <p:spPr>
+          <a:xfrm xmlns:a="http://schemas.openxmlformats.org/drawingml/2006/main">
+            <a:off x="1714500" y="2943225"/>
+            <a:ext cx="9334500" cy="9525"/>
+          </a:xfrm>
+          <a:prstGeom xmlns:a="http://schemas.openxmlformats.org/drawingml/2006/main" prst="rect">
             <a:avLst/>
           </a:prstGeom>
           <a:solidFill xmlns:a="http://schemas.openxmlformats.org/drawingml/2006/main">
-            <a:srgbClr val="2C6E73"/>
+            <a:srgbClr val="D9E0E6"/>
           </a:solidFill>
           <a:ln xmlns:a="http://schemas.openxmlformats.org/drawingml/2006/main" w="0">
-            <a:noFill/>
+            <a:solidFill>
+              <a:srgbClr val="D9E0E6"/>
+            </a:solidFill>
           </a:ln>
         </p:spPr>
       </p:sp>
@@ -8441,19 +8445,19 @@
           <p:cNvPr id="15" name="">
             <a:extLst xmlns:a="http://schemas.openxmlformats.org/drawingml/2006/main">
               <a:ext uri="{FF2B5EF4-FFF2-40B4-BE49-F238E27FC236}">
-                <a16:creationId xmlns:a16="http://schemas.microsoft.com/office/drawing/2014/main" id="{20B0090F-F6B2-463A-B13A-AF31D9EBB3C3}"/>
-              </a:ext>
-            </a:extLst>
-          </p:cNvPr>
-          <p:cNvSpPr>
-            <a:spLocks xmlns:a="http://schemas.openxmlformats.org/drawingml/2006/main" noGrp="1"/>
-          </p:cNvSpPr>
-          <p:nvPr/>
-        </p:nvSpPr>
-        <p:spPr>
-          <a:xfrm xmlns:a="http://schemas.openxmlformats.org/drawingml/2006/main">
-            <a:off x="1000125" y="3019425"/>
-            <a:ext cx="476250" cy="419100"/>
+                <a16:creationId xmlns:a16="http://schemas.microsoft.com/office/drawing/2014/main" id="{3B660A6D-9730-4A24-A881-2EF30B23D3A2}"/>
+              </a:ext>
+            </a:extLst>
+          </p:cNvPr>
+          <p:cNvSpPr>
+            <a:spLocks xmlns:a="http://schemas.openxmlformats.org/drawingml/2006/main" noGrp="1"/>
+          </p:cNvSpPr>
+          <p:nvPr/>
+        </p:nvSpPr>
+        <p:spPr>
+          <a:xfrm xmlns:a="http://schemas.openxmlformats.org/drawingml/2006/main">
+            <a:off x="1162050" y="3076575"/>
+            <a:ext cx="400050" cy="400050"/>
           </a:xfrm>
           <a:prstGeom xmlns:a="http://schemas.openxmlformats.org/drawingml/2006/main" prst="rect">
             <a:avLst/>
@@ -8470,9 +8474,9 @@
           <a:lstStyle xmlns:a="http://schemas.openxmlformats.org/drawingml/2006/main"/>
           <a:p xmlns:a="http://schemas.openxmlformats.org/drawingml/2006/main">
             <a:pPr algn="ctr">
-              <a:defRPr sz="1350" b="1">
-                <a:solidFill>
-                  <a:srgbClr val="FFFFFF"/>
+              <a:defRPr sz="1125" b="1">
+                <a:solidFill>
+                  <a:srgbClr val="2C6E73"/>
                 </a:solidFill>
                 <a:latin typeface="Arial"/>
                 <a:ea typeface="Arial"/>
@@ -8480,9 +8484,9 @@
               </a:defRPr>
             </a:pPr>
             <a:r>
-              <a:rPr sz="1350" b="1">
-                <a:solidFill>
-                  <a:srgbClr val="FFFFFF"/>
+              <a:rPr sz="1125" b="1">
+                <a:solidFill>
+                  <a:srgbClr val="2C6E73"/>
                 </a:solidFill>
                 <a:latin typeface="Arial"/>
                 <a:ea typeface="Arial"/>
@@ -8498,19 +8502,19 @@
           <p:cNvPr id="16" name="">
             <a:extLst xmlns:a="http://schemas.openxmlformats.org/drawingml/2006/main">
               <a:ext uri="{FF2B5EF4-FFF2-40B4-BE49-F238E27FC236}">
-                <a16:creationId xmlns:a16="http://schemas.microsoft.com/office/drawing/2014/main" id="{0C5E3364-5597-42B2-B7FB-39ED452940F8}"/>
-              </a:ext>
-            </a:extLst>
-          </p:cNvPr>
-          <p:cNvSpPr>
-            <a:spLocks xmlns:a="http://schemas.openxmlformats.org/drawingml/2006/main" noGrp="1"/>
-          </p:cNvSpPr>
-          <p:nvPr/>
-        </p:nvSpPr>
-        <p:spPr>
-          <a:xfrm xmlns:a="http://schemas.openxmlformats.org/drawingml/2006/main">
-            <a:off x="1714500" y="2924175"/>
-            <a:ext cx="9429750" cy="609600"/>
+                <a16:creationId xmlns:a16="http://schemas.microsoft.com/office/drawing/2014/main" id="{D881894E-C4EF-4516-BBE5-92A23637545D}"/>
+              </a:ext>
+            </a:extLst>
+          </p:cNvPr>
+          <p:cNvSpPr>
+            <a:spLocks xmlns:a="http://schemas.openxmlformats.org/drawingml/2006/main" noGrp="1"/>
+          </p:cNvSpPr>
+          <p:nvPr/>
+        </p:nvSpPr>
+        <p:spPr>
+          <a:xfrm xmlns:a="http://schemas.openxmlformats.org/drawingml/2006/main">
+            <a:off x="1714500" y="2990850"/>
+            <a:ext cx="9525000" cy="809625"/>
           </a:xfrm>
           <a:prstGeom xmlns:a="http://schemas.openxmlformats.org/drawingml/2006/main" prst="rect">
             <a:avLst/>
@@ -8527,7 +8531,7 @@
           <a:lstStyle xmlns:a="http://schemas.openxmlformats.org/drawingml/2006/main"/>
           <a:p xmlns:a="http://schemas.openxmlformats.org/drawingml/2006/main">
             <a:pPr algn="l">
-              <a:defRPr sz="1500" b="0">
+              <a:defRPr sz="1725" b="0">
                 <a:solidFill>
                   <a:srgbClr val="17253A"/>
                 </a:solidFill>
@@ -8537,7 +8541,7 @@
               </a:defRPr>
             </a:pPr>
             <a:r>
-              <a:rPr sz="1500" b="0">
+              <a:rPr sz="1725" b="0">
                 <a:solidFill>
                   <a:srgbClr val="17253A"/>
                 </a:solidFill>
@@ -8545,7 +8549,7 @@
                 <a:ea typeface="Arial"/>
                 <a:cs typeface="Arial"/>
               </a:rPr>
-              <a:t>Set up the method: Plan the operations in order before calculating.</a:t>
+              <a:t>48 × 125 = 6,000 books received</a:t>
             </a:r>
           </a:p>
         </p:txBody>
@@ -8555,28 +8559,30 @@
           <p:cNvPr id="17" name="">
             <a:extLst xmlns:a="http://schemas.openxmlformats.org/drawingml/2006/main">
               <a:ext uri="{FF2B5EF4-FFF2-40B4-BE49-F238E27FC236}">
-                <a16:creationId xmlns:a16="http://schemas.microsoft.com/office/drawing/2014/main" id="{649D59E7-4CE7-429F-B744-266D75F27890}"/>
-              </a:ext>
-            </a:extLst>
-          </p:cNvPr>
-          <p:cNvSpPr>
-            <a:spLocks xmlns:a="http://schemas.openxmlformats.org/drawingml/2006/main" noGrp="1"/>
-          </p:cNvSpPr>
-          <p:nvPr/>
-        </p:nvSpPr>
-        <p:spPr>
-          <a:xfrm xmlns:a="http://schemas.openxmlformats.org/drawingml/2006/main">
-            <a:off x="1000125" y="3733800"/>
-            <a:ext cx="476250" cy="476250"/>
-          </a:xfrm>
-          <a:prstGeom xmlns:a="http://schemas.openxmlformats.org/drawingml/2006/main" prst="ellipse">
+                <a16:creationId xmlns:a16="http://schemas.microsoft.com/office/drawing/2014/main" id="{160FEE98-FC16-4990-BE3F-8E7EC4861213}"/>
+              </a:ext>
+            </a:extLst>
+          </p:cNvPr>
+          <p:cNvSpPr>
+            <a:spLocks xmlns:a="http://schemas.openxmlformats.org/drawingml/2006/main" noGrp="1"/>
+          </p:cNvSpPr>
+          <p:nvPr/>
+        </p:nvSpPr>
+        <p:spPr>
+          <a:xfrm xmlns:a="http://schemas.openxmlformats.org/drawingml/2006/main">
+            <a:off x="1714500" y="3819525"/>
+            <a:ext cx="9334500" cy="9525"/>
+          </a:xfrm>
+          <a:prstGeom xmlns:a="http://schemas.openxmlformats.org/drawingml/2006/main" prst="rect">
             <a:avLst/>
           </a:prstGeom>
           <a:solidFill xmlns:a="http://schemas.openxmlformats.org/drawingml/2006/main">
-            <a:srgbClr val="2C6E73"/>
+            <a:srgbClr val="D9E0E6"/>
           </a:solidFill>
           <a:ln xmlns:a="http://schemas.openxmlformats.org/drawingml/2006/main" w="0">
-            <a:noFill/>
+            <a:solidFill>
+              <a:srgbClr val="D9E0E6"/>
+            </a:solidFill>
           </a:ln>
         </p:spPr>
       </p:sp>
@@ -8585,19 +8591,19 @@
           <p:cNvPr id="18" name="">
             <a:extLst xmlns:a="http://schemas.openxmlformats.org/drawingml/2006/main">
               <a:ext uri="{FF2B5EF4-FFF2-40B4-BE49-F238E27FC236}">
-                <a16:creationId xmlns:a16="http://schemas.microsoft.com/office/drawing/2014/main" id="{BD3292F7-0CC3-49E1-BC1D-1480BD256618}"/>
-              </a:ext>
-            </a:extLst>
-          </p:cNvPr>
-          <p:cNvSpPr>
-            <a:spLocks xmlns:a="http://schemas.openxmlformats.org/drawingml/2006/main" noGrp="1"/>
-          </p:cNvSpPr>
-          <p:nvPr/>
-        </p:nvSpPr>
-        <p:spPr>
-          <a:xfrm xmlns:a="http://schemas.openxmlformats.org/drawingml/2006/main">
-            <a:off x="1000125" y="3762375"/>
-            <a:ext cx="476250" cy="419100"/>
+                <a16:creationId xmlns:a16="http://schemas.microsoft.com/office/drawing/2014/main" id="{3A3EA540-EAEC-4B52-87B1-8AB096A18B3C}"/>
+              </a:ext>
+            </a:extLst>
+          </p:cNvPr>
+          <p:cNvSpPr>
+            <a:spLocks xmlns:a="http://schemas.openxmlformats.org/drawingml/2006/main" noGrp="1"/>
+          </p:cNvSpPr>
+          <p:nvPr/>
+        </p:nvSpPr>
+        <p:spPr>
+          <a:xfrm xmlns:a="http://schemas.openxmlformats.org/drawingml/2006/main">
+            <a:off x="1162050" y="3952875"/>
+            <a:ext cx="400050" cy="400050"/>
           </a:xfrm>
           <a:prstGeom xmlns:a="http://schemas.openxmlformats.org/drawingml/2006/main" prst="rect">
             <a:avLst/>
@@ -8614,9 +8620,9 @@
           <a:lstStyle xmlns:a="http://schemas.openxmlformats.org/drawingml/2006/main"/>
           <a:p xmlns:a="http://schemas.openxmlformats.org/drawingml/2006/main">
             <a:pPr algn="ctr">
-              <a:defRPr sz="1350" b="1">
-                <a:solidFill>
-                  <a:srgbClr val="FFFFFF"/>
+              <a:defRPr sz="1125" b="1">
+                <a:solidFill>
+                  <a:srgbClr val="2C6E73"/>
                 </a:solidFill>
                 <a:latin typeface="Arial"/>
                 <a:ea typeface="Arial"/>
@@ -8624,9 +8630,9 @@
               </a:defRPr>
             </a:pPr>
             <a:r>
-              <a:rPr sz="1350" b="1">
-                <a:solidFill>
-                  <a:srgbClr val="FFFFFF"/>
+              <a:rPr sz="1125" b="1">
+                <a:solidFill>
+                  <a:srgbClr val="2C6E73"/>
                 </a:solidFill>
                 <a:latin typeface="Arial"/>
                 <a:ea typeface="Arial"/>
@@ -8642,19 +8648,19 @@
           <p:cNvPr id="19" name="">
             <a:extLst xmlns:a="http://schemas.openxmlformats.org/drawingml/2006/main">
               <a:ext uri="{FF2B5EF4-FFF2-40B4-BE49-F238E27FC236}">
-                <a16:creationId xmlns:a16="http://schemas.microsoft.com/office/drawing/2014/main" id="{93A42905-7154-4688-95E4-9CB443C59DFD}"/>
-              </a:ext>
-            </a:extLst>
-          </p:cNvPr>
-          <p:cNvSpPr>
-            <a:spLocks xmlns:a="http://schemas.openxmlformats.org/drawingml/2006/main" noGrp="1"/>
-          </p:cNvSpPr>
-          <p:nvPr/>
-        </p:nvSpPr>
-        <p:spPr>
-          <a:xfrm xmlns:a="http://schemas.openxmlformats.org/drawingml/2006/main">
-            <a:off x="1714500" y="3667125"/>
-            <a:ext cx="9429750" cy="609600"/>
+                <a16:creationId xmlns:a16="http://schemas.microsoft.com/office/drawing/2014/main" id="{DCAEE2C1-F453-4DC9-8F28-D3CAA2CF9EF9}"/>
+              </a:ext>
+            </a:extLst>
+          </p:cNvPr>
+          <p:cNvSpPr>
+            <a:spLocks xmlns:a="http://schemas.openxmlformats.org/drawingml/2006/main" noGrp="1"/>
+          </p:cNvSpPr>
+          <p:nvPr/>
+        </p:nvSpPr>
+        <p:spPr>
+          <a:xfrm xmlns:a="http://schemas.openxmlformats.org/drawingml/2006/main">
+            <a:off x="1714500" y="3867150"/>
+            <a:ext cx="9525000" cy="809625"/>
           </a:xfrm>
           <a:prstGeom xmlns:a="http://schemas.openxmlformats.org/drawingml/2006/main" prst="rect">
             <a:avLst/>
@@ -8671,7 +8677,7 @@
           <a:lstStyle xmlns:a="http://schemas.openxmlformats.org/drawingml/2006/main"/>
           <a:p xmlns:a="http://schemas.openxmlformats.org/drawingml/2006/main">
             <a:pPr algn="l">
-              <a:defRPr sz="1500" b="0">
+              <a:defRPr sz="1725" b="0">
                 <a:solidFill>
                   <a:srgbClr val="17253A"/>
                 </a:solidFill>
@@ -8681,7 +8687,7 @@
               </a:defRPr>
             </a:pPr>
             <a:r>
-              <a:rPr sz="1500" b="0">
+              <a:rPr sz="1725" b="0">
                 <a:solidFill>
                   <a:srgbClr val="17253A"/>
                 </a:solidFill>
@@ -8689,7 +8695,7 @@
                 <a:ea typeface="Arial"/>
                 <a:cs typeface="Arial"/>
               </a:rPr>
-              <a:t>Complete the calculation: 48 x 125, then subtract 3,760. The answer is 2,240.</a:t>
+              <a:t>6,000 - 3,760</a:t>
             </a:r>
           </a:p>
         </p:txBody>
@@ -8699,28 +8705,30 @@
           <p:cNvPr id="20" name="">
             <a:extLst xmlns:a="http://schemas.openxmlformats.org/drawingml/2006/main">
               <a:ext uri="{FF2B5EF4-FFF2-40B4-BE49-F238E27FC236}">
-                <a16:creationId xmlns:a16="http://schemas.microsoft.com/office/drawing/2014/main" id="{9E340B88-2B69-4044-B3E0-F2E4D65AE201}"/>
-              </a:ext>
-            </a:extLst>
-          </p:cNvPr>
-          <p:cNvSpPr>
-            <a:spLocks xmlns:a="http://schemas.openxmlformats.org/drawingml/2006/main" noGrp="1"/>
-          </p:cNvSpPr>
-          <p:nvPr/>
-        </p:nvSpPr>
-        <p:spPr>
-          <a:xfrm xmlns:a="http://schemas.openxmlformats.org/drawingml/2006/main">
-            <a:off x="1000125" y="4476750"/>
-            <a:ext cx="476250" cy="476250"/>
-          </a:xfrm>
-          <a:prstGeom xmlns:a="http://schemas.openxmlformats.org/drawingml/2006/main" prst="ellipse">
+                <a16:creationId xmlns:a16="http://schemas.microsoft.com/office/drawing/2014/main" id="{2DC9445B-57CF-4317-91FD-C7EB6EB29A17}"/>
+              </a:ext>
+            </a:extLst>
+          </p:cNvPr>
+          <p:cNvSpPr>
+            <a:spLocks xmlns:a="http://schemas.openxmlformats.org/drawingml/2006/main" noGrp="1"/>
+          </p:cNvSpPr>
+          <p:nvPr/>
+        </p:nvSpPr>
+        <p:spPr>
+          <a:xfrm xmlns:a="http://schemas.openxmlformats.org/drawingml/2006/main">
+            <a:off x="1714500" y="4695825"/>
+            <a:ext cx="9334500" cy="9525"/>
+          </a:xfrm>
+          <a:prstGeom xmlns:a="http://schemas.openxmlformats.org/drawingml/2006/main" prst="rect">
             <a:avLst/>
           </a:prstGeom>
           <a:solidFill xmlns:a="http://schemas.openxmlformats.org/drawingml/2006/main">
-            <a:srgbClr val="2C6E73"/>
+            <a:srgbClr val="D9E0E6"/>
           </a:solidFill>
           <a:ln xmlns:a="http://schemas.openxmlformats.org/drawingml/2006/main" w="0">
-            <a:noFill/>
+            <a:solidFill>
+              <a:srgbClr val="D9E0E6"/>
+            </a:solidFill>
           </a:ln>
         </p:spPr>
       </p:sp>
@@ -8729,19 +8737,19 @@
           <p:cNvPr id="21" name="">
             <a:extLst xmlns:a="http://schemas.openxmlformats.org/drawingml/2006/main">
               <a:ext uri="{FF2B5EF4-FFF2-40B4-BE49-F238E27FC236}">
-                <a16:creationId xmlns:a16="http://schemas.microsoft.com/office/drawing/2014/main" id="{C5CC8CC6-382A-449A-8478-8CF948EB17F3}"/>
-              </a:ext>
-            </a:extLst>
-          </p:cNvPr>
-          <p:cNvSpPr>
-            <a:spLocks xmlns:a="http://schemas.openxmlformats.org/drawingml/2006/main" noGrp="1"/>
-          </p:cNvSpPr>
-          <p:nvPr/>
-        </p:nvSpPr>
-        <p:spPr>
-          <a:xfrm xmlns:a="http://schemas.openxmlformats.org/drawingml/2006/main">
-            <a:off x="1000125" y="4505325"/>
-            <a:ext cx="476250" cy="419100"/>
+                <a16:creationId xmlns:a16="http://schemas.microsoft.com/office/drawing/2014/main" id="{B1A22BAE-E409-4AC6-B6CC-BE8FF9F37A70}"/>
+              </a:ext>
+            </a:extLst>
+          </p:cNvPr>
+          <p:cNvSpPr>
+            <a:spLocks xmlns:a="http://schemas.openxmlformats.org/drawingml/2006/main" noGrp="1"/>
+          </p:cNvSpPr>
+          <p:nvPr/>
+        </p:nvSpPr>
+        <p:spPr>
+          <a:xfrm xmlns:a="http://schemas.openxmlformats.org/drawingml/2006/main">
+            <a:off x="1162050" y="4829175"/>
+            <a:ext cx="400050" cy="400050"/>
           </a:xfrm>
           <a:prstGeom xmlns:a="http://schemas.openxmlformats.org/drawingml/2006/main" prst="rect">
             <a:avLst/>
@@ -8758,9 +8766,9 @@
           <a:lstStyle xmlns:a="http://schemas.openxmlformats.org/drawingml/2006/main"/>
           <a:p xmlns:a="http://schemas.openxmlformats.org/drawingml/2006/main">
             <a:pPr algn="ctr">
-              <a:defRPr sz="1350" b="1">
-                <a:solidFill>
-                  <a:srgbClr val="FFFFFF"/>
+              <a:defRPr sz="1125" b="1">
+                <a:solidFill>
+                  <a:srgbClr val="2F785D"/>
                 </a:solidFill>
                 <a:latin typeface="Arial"/>
                 <a:ea typeface="Arial"/>
@@ -8768,9 +8776,9 @@
               </a:defRPr>
             </a:pPr>
             <a:r>
-              <a:rPr sz="1350" b="1">
-                <a:solidFill>
-                  <a:srgbClr val="FFFFFF"/>
+              <a:rPr sz="1125" b="1">
+                <a:solidFill>
+                  <a:srgbClr val="2F785D"/>
                 </a:solidFill>
                 <a:latin typeface="Arial"/>
                 <a:ea typeface="Arial"/>
@@ -8786,19 +8794,19 @@
           <p:cNvPr id="22" name="">
             <a:extLst xmlns:a="http://schemas.openxmlformats.org/drawingml/2006/main">
               <a:ext uri="{FF2B5EF4-FFF2-40B4-BE49-F238E27FC236}">
-                <a16:creationId xmlns:a16="http://schemas.microsoft.com/office/drawing/2014/main" id="{71566876-D05D-4FA6-9663-9CDDA49C278C}"/>
-              </a:ext>
-            </a:extLst>
-          </p:cNvPr>
-          <p:cNvSpPr>
-            <a:spLocks xmlns:a="http://schemas.openxmlformats.org/drawingml/2006/main" noGrp="1"/>
-          </p:cNvSpPr>
-          <p:nvPr/>
-        </p:nvSpPr>
-        <p:spPr>
-          <a:xfrm xmlns:a="http://schemas.openxmlformats.org/drawingml/2006/main">
-            <a:off x="1714500" y="4410075"/>
-            <a:ext cx="9429750" cy="609600"/>
+                <a16:creationId xmlns:a16="http://schemas.microsoft.com/office/drawing/2014/main" id="{B31957C7-30D7-49D8-B506-9FAAE0E4B4CC}"/>
+              </a:ext>
+            </a:extLst>
+          </p:cNvPr>
+          <p:cNvSpPr>
+            <a:spLocks xmlns:a="http://schemas.openxmlformats.org/drawingml/2006/main" noGrp="1"/>
+          </p:cNvSpPr>
+          <p:nvPr/>
+        </p:nvSpPr>
+        <p:spPr>
+          <a:xfrm xmlns:a="http://schemas.openxmlformats.org/drawingml/2006/main">
+            <a:off x="1714500" y="4743450"/>
+            <a:ext cx="9525000" cy="809625"/>
           </a:xfrm>
           <a:prstGeom xmlns:a="http://schemas.openxmlformats.org/drawingml/2006/main" prst="rect">
             <a:avLst/>
@@ -8815,7 +8823,7 @@
           <a:lstStyle xmlns:a="http://schemas.openxmlformats.org/drawingml/2006/main"/>
           <a:p xmlns:a="http://schemas.openxmlformats.org/drawingml/2006/main">
             <a:pPr algn="l">
-              <a:defRPr sz="1500" b="1">
+              <a:defRPr sz="1725" b="1">
                 <a:solidFill>
                   <a:srgbClr val="2F785D"/>
                 </a:solidFill>
@@ -8825,7 +8833,7 @@
               </a:defRPr>
             </a:pPr>
             <a:r>
-              <a:rPr sz="1500" b="1">
+              <a:rPr sz="1725" b="1">
                 <a:solidFill>
                   <a:srgbClr val="2F785D"/>
                 </a:solidFill>
@@ -8833,7 +8841,7 @@
                 <a:ea typeface="Arial"/>
                 <a:cs typeface="Arial"/>
               </a:rPr>
-              <a:t>Check the result: Complete each step, label sub-totals and check the final answer in context.</a:t>
+              <a:t>Books remaining = 2,240</a:t>
             </a:r>
           </a:p>
         </p:txBody>
@@ -8841,7 +8849,7 @@
     </p:spTree>
     <p:extLst>
       <p:ext uri="{BB962C8B-B14F-4D97-AF65-F5344CB8AC3E}">
-        <p14:creationId xmlns:p14="http://schemas.microsoft.com/office/powerpoint/2010/main" val="892049692"/>
+        <p14:creationId xmlns:p14="http://schemas.microsoft.com/office/powerpoint/2010/main" val="647505366"/>
       </p:ext>
     </p:extLst>
   </p:cSld>
@@ -9134,7 +9142,7 @@
           <p:cNvPr id="15" name="">
             <a:extLst xmlns:a="http://schemas.openxmlformats.org/drawingml/2006/main">
               <a:ext uri="{FF2B5EF4-FFF2-40B4-BE49-F238E27FC236}">
-                <a16:creationId xmlns:a16="http://schemas.microsoft.com/office/drawing/2014/main" id="{7311BC2D-9D69-478A-9AB0-A97B3C8FFA05}"/>
+                <a16:creationId xmlns:a16="http://schemas.microsoft.com/office/drawing/2014/main" id="{94195160-9FF0-44C6-B269-C1BC14E5D4FF}"/>
               </a:ext>
             </a:extLst>
           </p:cNvPr>
@@ -9166,7 +9174,7 @@
           <p:cNvPr id="2" name="">
             <a:extLst xmlns:a="http://schemas.openxmlformats.org/drawingml/2006/main">
               <a:ext uri="{FF2B5EF4-FFF2-40B4-BE49-F238E27FC236}">
-                <a16:creationId xmlns:a16="http://schemas.microsoft.com/office/drawing/2014/main" id="{918945EB-2432-4470-8776-361ED27EBD86}"/>
+                <a16:creationId xmlns:a16="http://schemas.microsoft.com/office/drawing/2014/main" id="{C987FC3E-9D62-4661-B1FE-53E371433DCB}"/>
               </a:ext>
             </a:extLst>
           </p:cNvPr>
@@ -9223,7 +9231,7 @@
           <p:cNvPr id="3" name="">
             <a:extLst xmlns:a="http://schemas.openxmlformats.org/drawingml/2006/main">
               <a:ext uri="{FF2B5EF4-FFF2-40B4-BE49-F238E27FC236}">
-                <a16:creationId xmlns:a16="http://schemas.microsoft.com/office/drawing/2014/main" id="{23B99835-6EF7-4265-988E-13C1335BD2E7}"/>
+                <a16:creationId xmlns:a16="http://schemas.microsoft.com/office/drawing/2014/main" id="{214EE067-FCC3-42AC-AC44-D9202AB2AA31}"/>
               </a:ext>
             </a:extLst>
           </p:cNvPr>
@@ -9255,7 +9263,7 @@
           <p:cNvPr id="4" name="">
             <a:extLst xmlns:a="http://schemas.openxmlformats.org/drawingml/2006/main">
               <a:ext uri="{FF2B5EF4-FFF2-40B4-BE49-F238E27FC236}">
-                <a16:creationId xmlns:a16="http://schemas.microsoft.com/office/drawing/2014/main" id="{B2B7A985-12B1-482E-8AE7-B76EE4375955}"/>
+                <a16:creationId xmlns:a16="http://schemas.microsoft.com/office/drawing/2014/main" id="{05C07DB4-09F7-4F90-A912-935B6E85DF5A}"/>
               </a:ext>
             </a:extLst>
           </p:cNvPr>
@@ -9312,7 +9320,7 @@
           <p:cNvPr id="5" name="">
             <a:extLst xmlns:a="http://schemas.openxmlformats.org/drawingml/2006/main">
               <a:ext uri="{FF2B5EF4-FFF2-40B4-BE49-F238E27FC236}">
-                <a16:creationId xmlns:a16="http://schemas.microsoft.com/office/drawing/2014/main" id="{E4C943DF-22FD-40B1-AF3F-BDB19A2E1803}"/>
+                <a16:creationId xmlns:a16="http://schemas.microsoft.com/office/drawing/2014/main" id="{78F64FA7-445E-4FB7-91A0-47563219D206}"/>
               </a:ext>
             </a:extLst>
           </p:cNvPr>
@@ -9369,7 +9377,7 @@
           <p:cNvPr id="6" name="">
             <a:extLst xmlns:a="http://schemas.openxmlformats.org/drawingml/2006/main">
               <a:ext uri="{FF2B5EF4-FFF2-40B4-BE49-F238E27FC236}">
-                <a16:creationId xmlns:a16="http://schemas.microsoft.com/office/drawing/2014/main" id="{1E70BBB3-1C73-40B5-B152-D0243FD20F39}"/>
+                <a16:creationId xmlns:a16="http://schemas.microsoft.com/office/drawing/2014/main" id="{9615FA4F-36DB-4FCA-A21B-5AD01C660C29}"/>
               </a:ext>
             </a:extLst>
           </p:cNvPr>
@@ -9426,7 +9434,7 @@
           <p:cNvPr id="7" name="">
             <a:extLst xmlns:a="http://schemas.openxmlformats.org/drawingml/2006/main">
               <a:ext uri="{FF2B5EF4-FFF2-40B4-BE49-F238E27FC236}">
-                <a16:creationId xmlns:a16="http://schemas.microsoft.com/office/drawing/2014/main" id="{3D27C3DA-B7EF-43DC-BD4B-47F5605433B5}"/>
+                <a16:creationId xmlns:a16="http://schemas.microsoft.com/office/drawing/2014/main" id="{5E9B9E1A-4452-4E0F-86A8-9EBF1BC23AA9}"/>
               </a:ext>
             </a:extLst>
           </p:cNvPr>
@@ -9458,7 +9466,7 @@
           <p:cNvPr id="8" name="">
             <a:extLst xmlns:a="http://schemas.openxmlformats.org/drawingml/2006/main">
               <a:ext uri="{FF2B5EF4-FFF2-40B4-BE49-F238E27FC236}">
-                <a16:creationId xmlns:a16="http://schemas.microsoft.com/office/drawing/2014/main" id="{1C946E40-0BF2-4411-9913-568604156AA7}"/>
+                <a16:creationId xmlns:a16="http://schemas.microsoft.com/office/drawing/2014/main" id="{1E3A954C-FABC-452E-98D0-5B64CE91D3DA}"/>
               </a:ext>
             </a:extLst>
           </p:cNvPr>
@@ -9515,7 +9523,7 @@
           <p:cNvPr id="9" name="">
             <a:extLst xmlns:a="http://schemas.openxmlformats.org/drawingml/2006/main">
               <a:ext uri="{FF2B5EF4-FFF2-40B4-BE49-F238E27FC236}">
-                <a16:creationId xmlns:a16="http://schemas.microsoft.com/office/drawing/2014/main" id="{0E98C954-0E87-4444-BE98-34389D09114E}"/>
+                <a16:creationId xmlns:a16="http://schemas.microsoft.com/office/drawing/2014/main" id="{4C698264-326A-44F6-B1E9-BCB23C50A61B}"/>
               </a:ext>
             </a:extLst>
           </p:cNvPr>
@@ -9572,7 +9580,7 @@
           <p:cNvPr id="10" name="">
             <a:extLst xmlns:a="http://schemas.openxmlformats.org/drawingml/2006/main">
               <a:ext uri="{FF2B5EF4-FFF2-40B4-BE49-F238E27FC236}">
-                <a16:creationId xmlns:a16="http://schemas.microsoft.com/office/drawing/2014/main" id="{54E5CE3C-F5A1-4402-93C8-EE283C6F063E}"/>
+                <a16:creationId xmlns:a16="http://schemas.microsoft.com/office/drawing/2014/main" id="{A64004E9-0084-4BEE-B7CB-B4DC472D9FA1}"/>
               </a:ext>
             </a:extLst>
           </p:cNvPr>
@@ -9629,7 +9637,7 @@
           <p:cNvPr id="11" name="">
             <a:extLst xmlns:a="http://schemas.openxmlformats.org/drawingml/2006/main">
               <a:ext uri="{FF2B5EF4-FFF2-40B4-BE49-F238E27FC236}">
-                <a16:creationId xmlns:a16="http://schemas.microsoft.com/office/drawing/2014/main" id="{6248D078-A0DE-4B0C-B2AF-CF1881A19608}"/>
+                <a16:creationId xmlns:a16="http://schemas.microsoft.com/office/drawing/2014/main" id="{7EF7DC6C-061B-4654-85EB-E6AE33D70267}"/>
               </a:ext>
             </a:extLst>
           </p:cNvPr>
@@ -9686,7 +9694,7 @@
           <p:cNvPr id="12" name="">
             <a:extLst xmlns:a="http://schemas.openxmlformats.org/drawingml/2006/main">
               <a:ext uri="{FF2B5EF4-FFF2-40B4-BE49-F238E27FC236}">
-                <a16:creationId xmlns:a16="http://schemas.microsoft.com/office/drawing/2014/main" id="{A8EE7F59-FBB3-45E9-9A44-FF63F1C02EFA}"/>
+                <a16:creationId xmlns:a16="http://schemas.microsoft.com/office/drawing/2014/main" id="{16D56116-CD78-46CC-B81D-FD9D1F4336EB}"/>
               </a:ext>
             </a:extLst>
           </p:cNvPr>
@@ -9718,7 +9726,7 @@
           <p:cNvPr id="13" name="">
             <a:extLst xmlns:a="http://schemas.openxmlformats.org/drawingml/2006/main">
               <a:ext uri="{FF2B5EF4-FFF2-40B4-BE49-F238E27FC236}">
-                <a16:creationId xmlns:a16="http://schemas.microsoft.com/office/drawing/2014/main" id="{19A82094-474B-42B8-9472-92239514C329}"/>
+                <a16:creationId xmlns:a16="http://schemas.microsoft.com/office/drawing/2014/main" id="{0116C8E4-1B33-4A8F-9DA3-FA49CCFF49D6}"/>
               </a:ext>
             </a:extLst>
           </p:cNvPr>
@@ -9775,7 +9783,7 @@
           <p:cNvPr id="14" name="">
             <a:extLst xmlns:a="http://schemas.openxmlformats.org/drawingml/2006/main">
               <a:ext uri="{FF2B5EF4-FFF2-40B4-BE49-F238E27FC236}">
-                <a16:creationId xmlns:a16="http://schemas.microsoft.com/office/drawing/2014/main" id="{520B7578-74A1-44A2-853F-831286A4F085}"/>
+                <a16:creationId xmlns:a16="http://schemas.microsoft.com/office/drawing/2014/main" id="{F6BF46A0-C8A3-4DE8-9C05-D0F7BCF59DBF}"/>
               </a:ext>
             </a:extLst>
           </p:cNvPr>
@@ -9830,7 +9838,7 @@
     </p:spTree>
     <p:extLst>
       <p:ext uri="{BB962C8B-B14F-4D97-AF65-F5344CB8AC3E}">
-        <p14:creationId xmlns:p14="http://schemas.microsoft.com/office/powerpoint/2010/main" val="1544474654"/>
+        <p14:creationId xmlns:p14="http://schemas.microsoft.com/office/powerpoint/2010/main" val="2117083205"/>
       </p:ext>
     </p:extLst>
   </p:cSld>
@@ -10031,7 +10039,7 @@
           <p:cNvPr id="16" name="">
             <a:extLst xmlns:a="http://schemas.openxmlformats.org/drawingml/2006/main">
               <a:ext uri="{FF2B5EF4-FFF2-40B4-BE49-F238E27FC236}">
-                <a16:creationId xmlns:a16="http://schemas.microsoft.com/office/drawing/2014/main" id="{5450797A-7DE9-433A-ABC7-34366B09D08B}"/>
+                <a16:creationId xmlns:a16="http://schemas.microsoft.com/office/drawing/2014/main" id="{0B4AE31B-F381-420F-A277-C9D460AB0483}"/>
               </a:ext>
             </a:extLst>
           </p:cNvPr>
@@ -10063,7 +10071,7 @@
           <p:cNvPr id="2" name="">
             <a:extLst xmlns:a="http://schemas.openxmlformats.org/drawingml/2006/main">
               <a:ext uri="{FF2B5EF4-FFF2-40B4-BE49-F238E27FC236}">
-                <a16:creationId xmlns:a16="http://schemas.microsoft.com/office/drawing/2014/main" id="{C1755E5A-FFD0-416D-B833-B229091BC783}"/>
+                <a16:creationId xmlns:a16="http://schemas.microsoft.com/office/drawing/2014/main" id="{A5B5B5D3-D0C8-4AD0-8FF9-592A18873F3C}"/>
               </a:ext>
             </a:extLst>
           </p:cNvPr>
@@ -10120,7 +10128,7 @@
           <p:cNvPr id="3" name="">
             <a:extLst xmlns:a="http://schemas.openxmlformats.org/drawingml/2006/main">
               <a:ext uri="{FF2B5EF4-FFF2-40B4-BE49-F238E27FC236}">
-                <a16:creationId xmlns:a16="http://schemas.microsoft.com/office/drawing/2014/main" id="{564961E9-0208-434C-8DB7-86E25F2839AA}"/>
+                <a16:creationId xmlns:a16="http://schemas.microsoft.com/office/drawing/2014/main" id="{1BC4FC0A-8659-4FDF-9A08-F95B574F395F}"/>
               </a:ext>
             </a:extLst>
           </p:cNvPr>
@@ -10152,7 +10160,7 @@
           <p:cNvPr id="4" name="">
             <a:extLst xmlns:a="http://schemas.openxmlformats.org/drawingml/2006/main">
               <a:ext uri="{FF2B5EF4-FFF2-40B4-BE49-F238E27FC236}">
-                <a16:creationId xmlns:a16="http://schemas.microsoft.com/office/drawing/2014/main" id="{74CFC380-A585-4494-9FF7-1A60A149A064}"/>
+                <a16:creationId xmlns:a16="http://schemas.microsoft.com/office/drawing/2014/main" id="{8ED25EED-437E-4E8C-95D8-873FA188C29C}"/>
               </a:ext>
             </a:extLst>
           </p:cNvPr>
@@ -10209,7 +10217,7 @@
           <p:cNvPr id="5" name="">
             <a:extLst xmlns:a="http://schemas.openxmlformats.org/drawingml/2006/main">
               <a:ext uri="{FF2B5EF4-FFF2-40B4-BE49-F238E27FC236}">
-                <a16:creationId xmlns:a16="http://schemas.microsoft.com/office/drawing/2014/main" id="{3B6D5D5D-81F8-4F5F-9065-BA93E89E7BBE}"/>
+                <a16:creationId xmlns:a16="http://schemas.microsoft.com/office/drawing/2014/main" id="{FE56822E-9C70-47D4-937B-F6A7FCBE29EE}"/>
               </a:ext>
             </a:extLst>
           </p:cNvPr>
@@ -10266,7 +10274,7 @@
           <p:cNvPr id="6" name="">
             <a:extLst xmlns:a="http://schemas.openxmlformats.org/drawingml/2006/main">
               <a:ext uri="{FF2B5EF4-FFF2-40B4-BE49-F238E27FC236}">
-                <a16:creationId xmlns:a16="http://schemas.microsoft.com/office/drawing/2014/main" id="{6BCA4FAA-F004-4CC2-8079-7E199F4BF066}"/>
+                <a16:creationId xmlns:a16="http://schemas.microsoft.com/office/drawing/2014/main" id="{A1DB419F-287F-4598-B9F6-3D09368A041B}"/>
               </a:ext>
             </a:extLst>
           </p:cNvPr>
@@ -10323,7 +10331,7 @@
           <p:cNvPr id="7" name="">
             <a:extLst xmlns:a="http://schemas.openxmlformats.org/drawingml/2006/main">
               <a:ext uri="{FF2B5EF4-FFF2-40B4-BE49-F238E27FC236}">
-                <a16:creationId xmlns:a16="http://schemas.microsoft.com/office/drawing/2014/main" id="{D3E379C9-AC69-43E5-BF42-72349D96F9FB}"/>
+                <a16:creationId xmlns:a16="http://schemas.microsoft.com/office/drawing/2014/main" id="{69D4461B-2EE4-4673-BA37-45AC6968F21F}"/>
               </a:ext>
             </a:extLst>
           </p:cNvPr>
@@ -10355,7 +10363,7 @@
           <p:cNvPr id="8" name="">
             <a:extLst xmlns:a="http://schemas.openxmlformats.org/drawingml/2006/main">
               <a:ext uri="{FF2B5EF4-FFF2-40B4-BE49-F238E27FC236}">
-                <a16:creationId xmlns:a16="http://schemas.microsoft.com/office/drawing/2014/main" id="{61DFACFE-DA03-43E4-81C0-8502572F0195}"/>
+                <a16:creationId xmlns:a16="http://schemas.microsoft.com/office/drawing/2014/main" id="{EB66E6C8-4795-4B73-B720-5393BEA17E85}"/>
               </a:ext>
             </a:extLst>
           </p:cNvPr>
@@ -10412,7 +10420,7 @@
           <p:cNvPr id="9" name="">
             <a:extLst xmlns:a="http://schemas.openxmlformats.org/drawingml/2006/main">
               <a:ext uri="{FF2B5EF4-FFF2-40B4-BE49-F238E27FC236}">
-                <a16:creationId xmlns:a16="http://schemas.microsoft.com/office/drawing/2014/main" id="{B3CB0C76-FDE3-4233-A4E7-F08773FFC62D}"/>
+                <a16:creationId xmlns:a16="http://schemas.microsoft.com/office/drawing/2014/main" id="{E4A03A77-E6CC-4F1B-B77D-34576FBA2398}"/>
               </a:ext>
             </a:extLst>
           </p:cNvPr>
@@ -10469,7 +10477,7 @@
           <p:cNvPr id="10" name="">
             <a:extLst xmlns:a="http://schemas.openxmlformats.org/drawingml/2006/main">
               <a:ext uri="{FF2B5EF4-FFF2-40B4-BE49-F238E27FC236}">
-                <a16:creationId xmlns:a16="http://schemas.microsoft.com/office/drawing/2014/main" id="{F4AB18C5-0EF6-439F-BE8C-2645C1C71232}"/>
+                <a16:creationId xmlns:a16="http://schemas.microsoft.com/office/drawing/2014/main" id="{1E3B7C43-832B-4F6A-BF87-03660C395F69}"/>
               </a:ext>
             </a:extLst>
           </p:cNvPr>
@@ -10526,7 +10534,7 @@
           <p:cNvPr id="11" name="">
             <a:extLst xmlns:a="http://schemas.openxmlformats.org/drawingml/2006/main">
               <a:ext uri="{FF2B5EF4-FFF2-40B4-BE49-F238E27FC236}">
-                <a16:creationId xmlns:a16="http://schemas.microsoft.com/office/drawing/2014/main" id="{D0DA2AAB-7297-485B-854F-3368DB7E281D}"/>
+                <a16:creationId xmlns:a16="http://schemas.microsoft.com/office/drawing/2014/main" id="{32F6CAB5-6623-4AE4-91B1-8A8C22CE5EBE}"/>
               </a:ext>
             </a:extLst>
           </p:cNvPr>
@@ -10583,7 +10591,7 @@
           <p:cNvPr id="12" name="">
             <a:extLst xmlns:a="http://schemas.openxmlformats.org/drawingml/2006/main">
               <a:ext uri="{FF2B5EF4-FFF2-40B4-BE49-F238E27FC236}">
-                <a16:creationId xmlns:a16="http://schemas.microsoft.com/office/drawing/2014/main" id="{403212D6-7C5A-4860-A28A-7EBADB5F3FFF}"/>
+                <a16:creationId xmlns:a16="http://schemas.microsoft.com/office/drawing/2014/main" id="{99DAF02A-3B1B-4C0C-8EA6-3D31FFA3C1C6}"/>
               </a:ext>
             </a:extLst>
           </p:cNvPr>
@@ -10640,7 +10648,7 @@
           <p:cNvPr id="13" name="">
             <a:extLst xmlns:a="http://schemas.openxmlformats.org/drawingml/2006/main">
               <a:ext uri="{FF2B5EF4-FFF2-40B4-BE49-F238E27FC236}">
-                <a16:creationId xmlns:a16="http://schemas.microsoft.com/office/drawing/2014/main" id="{BF5EC6B8-2079-4F70-9928-1DBD14ED2A86}"/>
+                <a16:creationId xmlns:a16="http://schemas.microsoft.com/office/drawing/2014/main" id="{04E08F3B-7AD9-490F-B662-FE79A88E6F82}"/>
               </a:ext>
             </a:extLst>
           </p:cNvPr>
@@ -10697,7 +10705,7 @@
           <p:cNvPr id="14" name="">
             <a:extLst xmlns:a="http://schemas.openxmlformats.org/drawingml/2006/main">
               <a:ext uri="{FF2B5EF4-FFF2-40B4-BE49-F238E27FC236}">
-                <a16:creationId xmlns:a16="http://schemas.microsoft.com/office/drawing/2014/main" id="{C94D6640-02A1-4FF4-8E42-9B68E460AFF0}"/>
+                <a16:creationId xmlns:a16="http://schemas.microsoft.com/office/drawing/2014/main" id="{781F80BA-9C5D-47EC-8F6B-7C0A39807C59}"/>
               </a:ext>
             </a:extLst>
           </p:cNvPr>
@@ -10754,7 +10762,7 @@
           <p:cNvPr id="15" name="">
             <a:extLst xmlns:a="http://schemas.openxmlformats.org/drawingml/2006/main">
               <a:ext uri="{FF2B5EF4-FFF2-40B4-BE49-F238E27FC236}">
-                <a16:creationId xmlns:a16="http://schemas.microsoft.com/office/drawing/2014/main" id="{48A472F0-92F6-4666-BA87-6FCE381D4526}"/>
+                <a16:creationId xmlns:a16="http://schemas.microsoft.com/office/drawing/2014/main" id="{75269B0D-AB1B-4BC1-945E-141A99697171}"/>
               </a:ext>
             </a:extLst>
           </p:cNvPr>
@@ -10809,7 +10817,7 @@
     </p:spTree>
     <p:extLst>
       <p:ext uri="{BB962C8B-B14F-4D97-AF65-F5344CB8AC3E}">
-        <p14:creationId xmlns:p14="http://schemas.microsoft.com/office/powerpoint/2010/main" val="448423911"/>
+        <p14:creationId xmlns:p14="http://schemas.microsoft.com/office/powerpoint/2010/main" val="1739401341"/>
       </p:ext>
     </p:extLst>
   </p:cSld>
@@ -10964,7 +10972,7 @@
           <p:cNvPr id="16" name="">
             <a:extLst xmlns:a="http://schemas.openxmlformats.org/drawingml/2006/main">
               <a:ext uri="{FF2B5EF4-FFF2-40B4-BE49-F238E27FC236}">
-                <a16:creationId xmlns:a16="http://schemas.microsoft.com/office/drawing/2014/main" id="{CAD24E51-6C5C-4372-900F-ECEFB2644BDA}"/>
+                <a16:creationId xmlns:a16="http://schemas.microsoft.com/office/drawing/2014/main" id="{12985FC1-4A9F-4F00-84B9-D041A7105283}"/>
               </a:ext>
             </a:extLst>
           </p:cNvPr>
@@ -10996,7 +11004,7 @@
           <p:cNvPr id="2" name="">
             <a:extLst xmlns:a="http://schemas.openxmlformats.org/drawingml/2006/main">
               <a:ext uri="{FF2B5EF4-FFF2-40B4-BE49-F238E27FC236}">
-                <a16:creationId xmlns:a16="http://schemas.microsoft.com/office/drawing/2014/main" id="{FB141D69-D791-4511-9C16-4E70BF16D1BB}"/>
+                <a16:creationId xmlns:a16="http://schemas.microsoft.com/office/drawing/2014/main" id="{A5BDB441-6CFE-49DC-89B0-113182664198}"/>
               </a:ext>
             </a:extLst>
           </p:cNvPr>
@@ -11053,7 +11061,7 @@
           <p:cNvPr id="3" name="">
             <a:extLst xmlns:a="http://schemas.openxmlformats.org/drawingml/2006/main">
               <a:ext uri="{FF2B5EF4-FFF2-40B4-BE49-F238E27FC236}">
-                <a16:creationId xmlns:a16="http://schemas.microsoft.com/office/drawing/2014/main" id="{C110AFC7-4176-487D-BF39-F3336CAEC967}"/>
+                <a16:creationId xmlns:a16="http://schemas.microsoft.com/office/drawing/2014/main" id="{4E6164A4-E820-4B85-95A0-A7A8E8809EE2}"/>
               </a:ext>
             </a:extLst>
           </p:cNvPr>
@@ -11085,7 +11093,7 @@
           <p:cNvPr id="4" name="">
             <a:extLst xmlns:a="http://schemas.openxmlformats.org/drawingml/2006/main">
               <a:ext uri="{FF2B5EF4-FFF2-40B4-BE49-F238E27FC236}">
-                <a16:creationId xmlns:a16="http://schemas.microsoft.com/office/drawing/2014/main" id="{14BACD69-89CF-4A1E-8785-570C47C00D4A}"/>
+                <a16:creationId xmlns:a16="http://schemas.microsoft.com/office/drawing/2014/main" id="{1FBD93B1-1CCC-4239-9D72-88D14B942A7B}"/>
               </a:ext>
             </a:extLst>
           </p:cNvPr>
@@ -11142,7 +11150,7 @@
           <p:cNvPr id="5" name="">
             <a:extLst xmlns:a="http://schemas.openxmlformats.org/drawingml/2006/main">
               <a:ext uri="{FF2B5EF4-FFF2-40B4-BE49-F238E27FC236}">
-                <a16:creationId xmlns:a16="http://schemas.microsoft.com/office/drawing/2014/main" id="{D2AD3406-1135-415A-859B-F2F3F7A64A77}"/>
+                <a16:creationId xmlns:a16="http://schemas.microsoft.com/office/drawing/2014/main" id="{38AF4A4B-05B9-414B-83B0-E585A1B45EA6}"/>
               </a:ext>
             </a:extLst>
           </p:cNvPr>
@@ -11199,7 +11207,7 @@
           <p:cNvPr id="6" name="">
             <a:extLst xmlns:a="http://schemas.openxmlformats.org/drawingml/2006/main">
               <a:ext uri="{FF2B5EF4-FFF2-40B4-BE49-F238E27FC236}">
-                <a16:creationId xmlns:a16="http://schemas.microsoft.com/office/drawing/2014/main" id="{FE340141-78D2-42C3-B124-66E9DD6F996B}"/>
+                <a16:creationId xmlns:a16="http://schemas.microsoft.com/office/drawing/2014/main" id="{ADA8E043-26D9-45B5-8772-A7D86082330D}"/>
               </a:ext>
             </a:extLst>
           </p:cNvPr>
@@ -11256,7 +11264,7 @@
           <p:cNvPr id="7" name="">
             <a:extLst xmlns:a="http://schemas.openxmlformats.org/drawingml/2006/main">
               <a:ext uri="{FF2B5EF4-FFF2-40B4-BE49-F238E27FC236}">
-                <a16:creationId xmlns:a16="http://schemas.microsoft.com/office/drawing/2014/main" id="{C9C9FDF0-D1E3-451C-BCAA-65FD1F714511}"/>
+                <a16:creationId xmlns:a16="http://schemas.microsoft.com/office/drawing/2014/main" id="{2A5DD17D-F1C7-4F03-A5FB-55E4229B9B04}"/>
               </a:ext>
             </a:extLst>
           </p:cNvPr>
@@ -11288,7 +11296,7 @@
           <p:cNvPr id="8" name="">
             <a:extLst xmlns:a="http://schemas.openxmlformats.org/drawingml/2006/main">
               <a:ext uri="{FF2B5EF4-FFF2-40B4-BE49-F238E27FC236}">
-                <a16:creationId xmlns:a16="http://schemas.microsoft.com/office/drawing/2014/main" id="{DAFD7076-56C9-4AB4-9C51-3D12CCF8A278}"/>
+                <a16:creationId xmlns:a16="http://schemas.microsoft.com/office/drawing/2014/main" id="{DD27A94B-0EDD-4416-AB51-9FDF6138A891}"/>
               </a:ext>
             </a:extLst>
           </p:cNvPr>
@@ -11345,7 +11353,7 @@
           <p:cNvPr id="9" name="">
             <a:extLst xmlns:a="http://schemas.openxmlformats.org/drawingml/2006/main">
               <a:ext uri="{FF2B5EF4-FFF2-40B4-BE49-F238E27FC236}">
-                <a16:creationId xmlns:a16="http://schemas.microsoft.com/office/drawing/2014/main" id="{D0F6D5DE-83C8-4D4A-A5A6-A81D81780C03}"/>
+                <a16:creationId xmlns:a16="http://schemas.microsoft.com/office/drawing/2014/main" id="{E56EF6E7-B240-4E61-9619-72B7F663EE85}"/>
               </a:ext>
             </a:extLst>
           </p:cNvPr>
@@ -11406,7 +11414,7 @@
           <p:nvPr/>
         </p:nvPicPr>
         <p:blipFill>
-          <a:blip xmlns:r="http://schemas.openxmlformats.org/officeDocument/2006/relationships" xmlns:a="http://schemas.openxmlformats.org/drawingml/2006/main" r:embed="R2aa13ab417f3484c"/>
+          <a:blip xmlns:r="http://schemas.openxmlformats.org/officeDocument/2006/relationships" xmlns:a="http://schemas.openxmlformats.org/drawingml/2006/main" r:embed="R7c87d5624d9e459c"/>
           <a:stretch xmlns:a="http://schemas.openxmlformats.org/drawingml/2006/main"/>
         </p:blipFill>
         <p:spPr>
@@ -11424,7 +11432,7 @@
           <p:cNvPr id="11" name="">
             <a:extLst xmlns:a="http://schemas.openxmlformats.org/drawingml/2006/main">
               <a:ext uri="{FF2B5EF4-FFF2-40B4-BE49-F238E27FC236}">
-                <a16:creationId xmlns:a16="http://schemas.microsoft.com/office/drawing/2014/main" id="{602AC068-D29C-4095-98B6-C200967E659C}"/>
+                <a16:creationId xmlns:a16="http://schemas.microsoft.com/office/drawing/2014/main" id="{B857A8AD-E385-4B22-83F9-BF9E35485A68}"/>
               </a:ext>
             </a:extLst>
           </p:cNvPr>
@@ -11481,7 +11489,7 @@
           <p:cNvPr id="12" name="">
             <a:extLst xmlns:a="http://schemas.openxmlformats.org/drawingml/2006/main">
               <a:ext uri="{FF2B5EF4-FFF2-40B4-BE49-F238E27FC236}">
-                <a16:creationId xmlns:a16="http://schemas.microsoft.com/office/drawing/2014/main" id="{138C43D2-F822-42CD-B5D0-7FBEF163E817}"/>
+                <a16:creationId xmlns:a16="http://schemas.microsoft.com/office/drawing/2014/main" id="{203F55FA-78AC-4E9C-8B5E-74631E1B7FAD}"/>
               </a:ext>
             </a:extLst>
           </p:cNvPr>
@@ -11538,7 +11546,7 @@
           <p:cNvPr id="13" name="">
             <a:extLst xmlns:a="http://schemas.openxmlformats.org/drawingml/2006/main">
               <a:ext uri="{FF2B5EF4-FFF2-40B4-BE49-F238E27FC236}">
-                <a16:creationId xmlns:a16="http://schemas.microsoft.com/office/drawing/2014/main" id="{E7979443-D13C-4F6E-91DC-D1A5AFEC1BCE}"/>
+                <a16:creationId xmlns:a16="http://schemas.microsoft.com/office/drawing/2014/main" id="{AF87709D-2648-48A5-A65A-E35F2CA4ED81}"/>
               </a:ext>
             </a:extLst>
           </p:cNvPr>
@@ -11570,7 +11578,7 @@
           <p:cNvPr id="14" name="">
             <a:extLst xmlns:a="http://schemas.openxmlformats.org/drawingml/2006/main">
               <a:ext uri="{FF2B5EF4-FFF2-40B4-BE49-F238E27FC236}">
-                <a16:creationId xmlns:a16="http://schemas.microsoft.com/office/drawing/2014/main" id="{8A6CD029-729A-491F-9387-2FEFCE09F9A4}"/>
+                <a16:creationId xmlns:a16="http://schemas.microsoft.com/office/drawing/2014/main" id="{86DE9A19-7F06-4AE2-ACB3-99DDC583C481}"/>
               </a:ext>
             </a:extLst>
           </p:cNvPr>
@@ -11627,7 +11635,7 @@
           <p:cNvPr id="15" name="">
             <a:extLst xmlns:a="http://schemas.openxmlformats.org/drawingml/2006/main">
               <a:ext uri="{FF2B5EF4-FFF2-40B4-BE49-F238E27FC236}">
-                <a16:creationId xmlns:a16="http://schemas.microsoft.com/office/drawing/2014/main" id="{72B55A1D-0566-4A50-9B46-B502E1AC0C0F}"/>
+                <a16:creationId xmlns:a16="http://schemas.microsoft.com/office/drawing/2014/main" id="{F646D82B-43D3-4E04-BCBF-93CAAB79042B}"/>
               </a:ext>
             </a:extLst>
           </p:cNvPr>
@@ -11682,7 +11690,7 @@
     </p:spTree>
     <p:extLst>
       <p:ext uri="{BB962C8B-B14F-4D97-AF65-F5344CB8AC3E}">
-        <p14:creationId xmlns:p14="http://schemas.microsoft.com/office/powerpoint/2010/main" val="108597889"/>
+        <p14:creationId xmlns:p14="http://schemas.microsoft.com/office/powerpoint/2010/main" val="1284072105"/>
       </p:ext>
     </p:extLst>
   </p:cSld>
@@ -11837,7 +11845,7 @@
           <p:cNvPr id="23" name="">
             <a:extLst xmlns:a="http://schemas.openxmlformats.org/drawingml/2006/main">
               <a:ext uri="{FF2B5EF4-FFF2-40B4-BE49-F238E27FC236}">
-                <a16:creationId xmlns:a16="http://schemas.microsoft.com/office/drawing/2014/main" id="{0375495D-B78E-4F28-9D19-794E3247589B}"/>
+                <a16:creationId xmlns:a16="http://schemas.microsoft.com/office/drawing/2014/main" id="{E0DE70A7-CE05-481F-A9A7-1C5BC0EE6EBB}"/>
               </a:ext>
             </a:extLst>
           </p:cNvPr>
@@ -11869,7 +11877,7 @@
           <p:cNvPr id="2" name="">
             <a:extLst xmlns:a="http://schemas.openxmlformats.org/drawingml/2006/main">
               <a:ext uri="{FF2B5EF4-FFF2-40B4-BE49-F238E27FC236}">
-                <a16:creationId xmlns:a16="http://schemas.microsoft.com/office/drawing/2014/main" id="{B582BD64-77F3-4B8A-9FB1-770BAC62CB0A}"/>
+                <a16:creationId xmlns:a16="http://schemas.microsoft.com/office/drawing/2014/main" id="{2062A8CC-90F7-4EC6-A1C3-7BE4BDBBF8C5}"/>
               </a:ext>
             </a:extLst>
           </p:cNvPr>
@@ -11926,7 +11934,7 @@
           <p:cNvPr id="3" name="">
             <a:extLst xmlns:a="http://schemas.openxmlformats.org/drawingml/2006/main">
               <a:ext uri="{FF2B5EF4-FFF2-40B4-BE49-F238E27FC236}">
-                <a16:creationId xmlns:a16="http://schemas.microsoft.com/office/drawing/2014/main" id="{72255468-A44E-43A0-84A6-F741AE1C50FA}"/>
+                <a16:creationId xmlns:a16="http://schemas.microsoft.com/office/drawing/2014/main" id="{BD4F5603-D625-4CB5-AB71-F9F272D49230}"/>
               </a:ext>
             </a:extLst>
           </p:cNvPr>
@@ -11958,7 +11966,7 @@
           <p:cNvPr id="4" name="">
             <a:extLst xmlns:a="http://schemas.openxmlformats.org/drawingml/2006/main">
               <a:ext uri="{FF2B5EF4-FFF2-40B4-BE49-F238E27FC236}">
-                <a16:creationId xmlns:a16="http://schemas.microsoft.com/office/drawing/2014/main" id="{05966A68-59DF-44D9-9233-A8A250532693}"/>
+                <a16:creationId xmlns:a16="http://schemas.microsoft.com/office/drawing/2014/main" id="{3EF29840-9971-45A6-A4A9-59F83F02DA94}"/>
               </a:ext>
             </a:extLst>
           </p:cNvPr>
@@ -12015,7 +12023,7 @@
           <p:cNvPr id="5" name="">
             <a:extLst xmlns:a="http://schemas.openxmlformats.org/drawingml/2006/main">
               <a:ext uri="{FF2B5EF4-FFF2-40B4-BE49-F238E27FC236}">
-                <a16:creationId xmlns:a16="http://schemas.microsoft.com/office/drawing/2014/main" id="{34BB8CA4-FD73-48EF-A796-35778C3BDFC8}"/>
+                <a16:creationId xmlns:a16="http://schemas.microsoft.com/office/drawing/2014/main" id="{479D1A65-2FE6-4F19-A06B-E8E507C2896B}"/>
               </a:ext>
             </a:extLst>
           </p:cNvPr>
@@ -12072,7 +12080,7 @@
           <p:cNvPr id="6" name="">
             <a:extLst xmlns:a="http://schemas.openxmlformats.org/drawingml/2006/main">
               <a:ext uri="{FF2B5EF4-FFF2-40B4-BE49-F238E27FC236}">
-                <a16:creationId xmlns:a16="http://schemas.microsoft.com/office/drawing/2014/main" id="{FB374DBE-4F6C-4F3E-8BA6-75FDBE855D65}"/>
+                <a16:creationId xmlns:a16="http://schemas.microsoft.com/office/drawing/2014/main" id="{D5FAA017-B84E-4CC7-8025-1DCBDA247EEC}"/>
               </a:ext>
             </a:extLst>
           </p:cNvPr>
@@ -12129,7 +12137,7 @@
           <p:cNvPr id="7" name="">
             <a:extLst xmlns:a="http://schemas.openxmlformats.org/drawingml/2006/main">
               <a:ext uri="{FF2B5EF4-FFF2-40B4-BE49-F238E27FC236}">
-                <a16:creationId xmlns:a16="http://schemas.microsoft.com/office/drawing/2014/main" id="{9297218A-58B2-4D74-BDCD-EF5BB08F58C5}"/>
+                <a16:creationId xmlns:a16="http://schemas.microsoft.com/office/drawing/2014/main" id="{41B19F50-2685-4719-B620-D9A1281A4B69}"/>
               </a:ext>
             </a:extLst>
           </p:cNvPr>
@@ -12161,7 +12169,7 @@
           <p:cNvPr id="8" name="">
             <a:extLst xmlns:a="http://schemas.openxmlformats.org/drawingml/2006/main">
               <a:ext uri="{FF2B5EF4-FFF2-40B4-BE49-F238E27FC236}">
-                <a16:creationId xmlns:a16="http://schemas.microsoft.com/office/drawing/2014/main" id="{83503898-C988-4E8C-A039-621880FEFA51}"/>
+                <a16:creationId xmlns:a16="http://schemas.microsoft.com/office/drawing/2014/main" id="{65C440E9-483B-4E0B-9062-2FC00C9DD7DA}"/>
               </a:ext>
             </a:extLst>
           </p:cNvPr>
@@ -12218,7 +12226,7 @@
           <p:cNvPr id="9" name="">
             <a:extLst xmlns:a="http://schemas.openxmlformats.org/drawingml/2006/main">
               <a:ext uri="{FF2B5EF4-FFF2-40B4-BE49-F238E27FC236}">
-                <a16:creationId xmlns:a16="http://schemas.microsoft.com/office/drawing/2014/main" id="{22D472DB-621B-4BB4-A484-837E6B0A813A}"/>
+                <a16:creationId xmlns:a16="http://schemas.microsoft.com/office/drawing/2014/main" id="{D29E181D-4B9B-47CE-BA54-0BEE85B9A17D}"/>
               </a:ext>
             </a:extLst>
           </p:cNvPr>
@@ -12275,7 +12283,7 @@
           <p:cNvPr id="10" name="">
             <a:extLst xmlns:a="http://schemas.openxmlformats.org/drawingml/2006/main">
               <a:ext uri="{FF2B5EF4-FFF2-40B4-BE49-F238E27FC236}">
-                <a16:creationId xmlns:a16="http://schemas.microsoft.com/office/drawing/2014/main" id="{70C45BAF-BEE2-4818-85BA-1DD4ADED7B2C}"/>
+                <a16:creationId xmlns:a16="http://schemas.microsoft.com/office/drawing/2014/main" id="{AA72A1DB-EE6C-41A8-AB42-292985E9948E}"/>
               </a:ext>
             </a:extLst>
           </p:cNvPr>
@@ -12309,7 +12317,7 @@
           <p:cNvPr id="11" name="">
             <a:extLst xmlns:a="http://schemas.openxmlformats.org/drawingml/2006/main">
               <a:ext uri="{FF2B5EF4-FFF2-40B4-BE49-F238E27FC236}">
-                <a16:creationId xmlns:a16="http://schemas.microsoft.com/office/drawing/2014/main" id="{D4FE20B2-A55E-44A7-8AA8-2B0B0DB97057}"/>
+                <a16:creationId xmlns:a16="http://schemas.microsoft.com/office/drawing/2014/main" id="{2645D599-BAD7-4051-9F83-478179293220}"/>
               </a:ext>
             </a:extLst>
           </p:cNvPr>
@@ -12341,7 +12349,7 @@
           <p:cNvPr id="12" name="">
             <a:extLst xmlns:a="http://schemas.openxmlformats.org/drawingml/2006/main">
               <a:ext uri="{FF2B5EF4-FFF2-40B4-BE49-F238E27FC236}">
-                <a16:creationId xmlns:a16="http://schemas.microsoft.com/office/drawing/2014/main" id="{D1319D02-8D1F-40C9-BDA3-601F703881B5}"/>
+                <a16:creationId xmlns:a16="http://schemas.microsoft.com/office/drawing/2014/main" id="{DF84A1BA-7F3C-451F-9633-ECDDE2923E77}"/>
               </a:ext>
             </a:extLst>
           </p:cNvPr>
@@ -12398,7 +12406,7 @@
           <p:cNvPr id="13" name="">
             <a:extLst xmlns:a="http://schemas.openxmlformats.org/drawingml/2006/main">
               <a:ext uri="{FF2B5EF4-FFF2-40B4-BE49-F238E27FC236}">
-                <a16:creationId xmlns:a16="http://schemas.microsoft.com/office/drawing/2014/main" id="{A1F53AD2-2735-429A-8344-FF248F74532B}"/>
+                <a16:creationId xmlns:a16="http://schemas.microsoft.com/office/drawing/2014/main" id="{82E68A45-7FDB-49B0-A545-AA3D8B0147C1}"/>
               </a:ext>
             </a:extLst>
           </p:cNvPr>
@@ -12455,7 +12463,7 @@
           <p:cNvPr id="14" name="">
             <a:extLst xmlns:a="http://schemas.openxmlformats.org/drawingml/2006/main">
               <a:ext uri="{FF2B5EF4-FFF2-40B4-BE49-F238E27FC236}">
-                <a16:creationId xmlns:a16="http://schemas.microsoft.com/office/drawing/2014/main" id="{C82DF0CF-5BE8-4C1B-8BBC-C2C9E0C751F7}"/>
+                <a16:creationId xmlns:a16="http://schemas.microsoft.com/office/drawing/2014/main" id="{817C3F7D-0496-4DA3-8A62-F85D67FBAD89}"/>
               </a:ext>
             </a:extLst>
           </p:cNvPr>
@@ -12489,7 +12497,7 @@
           <p:cNvPr id="15" name="">
             <a:extLst xmlns:a="http://schemas.openxmlformats.org/drawingml/2006/main">
               <a:ext uri="{FF2B5EF4-FFF2-40B4-BE49-F238E27FC236}">
-                <a16:creationId xmlns:a16="http://schemas.microsoft.com/office/drawing/2014/main" id="{56DD5A23-1DF6-4AAE-80E8-546089FDF6E5}"/>
+                <a16:creationId xmlns:a16="http://schemas.microsoft.com/office/drawing/2014/main" id="{0333079E-568D-4375-B015-D0342B2D153E}"/>
               </a:ext>
             </a:extLst>
           </p:cNvPr>
@@ -12521,7 +12529,7 @@
           <p:cNvPr id="16" name="">
             <a:extLst xmlns:a="http://schemas.openxmlformats.org/drawingml/2006/main">
               <a:ext uri="{FF2B5EF4-FFF2-40B4-BE49-F238E27FC236}">
-                <a16:creationId xmlns:a16="http://schemas.microsoft.com/office/drawing/2014/main" id="{A6946DF8-DB66-414B-80A0-6F75D845F4FB}"/>
+                <a16:creationId xmlns:a16="http://schemas.microsoft.com/office/drawing/2014/main" id="{1C7B243D-8AAB-48E8-A3C1-02EDCDA71737}"/>
               </a:ext>
             </a:extLst>
           </p:cNvPr>
@@ -12578,7 +12586,7 @@
           <p:cNvPr id="17" name="">
             <a:extLst xmlns:a="http://schemas.openxmlformats.org/drawingml/2006/main">
               <a:ext uri="{FF2B5EF4-FFF2-40B4-BE49-F238E27FC236}">
-                <a16:creationId xmlns:a16="http://schemas.microsoft.com/office/drawing/2014/main" id="{EAC7F888-61FA-4C29-AF67-4BBB4C879DD1}"/>
+                <a16:creationId xmlns:a16="http://schemas.microsoft.com/office/drawing/2014/main" id="{C5A788A8-3915-4EA4-86F0-FD421386348E}"/>
               </a:ext>
             </a:extLst>
           </p:cNvPr>
@@ -12635,7 +12643,7 @@
           <p:cNvPr id="18" name="">
             <a:extLst xmlns:a="http://schemas.openxmlformats.org/drawingml/2006/main">
               <a:ext uri="{FF2B5EF4-FFF2-40B4-BE49-F238E27FC236}">
-                <a16:creationId xmlns:a16="http://schemas.microsoft.com/office/drawing/2014/main" id="{0011A137-C43B-4221-B487-7A1AB745C0C3}"/>
+                <a16:creationId xmlns:a16="http://schemas.microsoft.com/office/drawing/2014/main" id="{FFD7AEBB-53F4-467F-B543-57AE8C569A60}"/>
               </a:ext>
             </a:extLst>
           </p:cNvPr>
@@ -12669,7 +12677,7 @@
           <p:cNvPr id="19" name="">
             <a:extLst xmlns:a="http://schemas.openxmlformats.org/drawingml/2006/main">
               <a:ext uri="{FF2B5EF4-FFF2-40B4-BE49-F238E27FC236}">
-                <a16:creationId xmlns:a16="http://schemas.microsoft.com/office/drawing/2014/main" id="{AAAC5BFD-0F77-46A7-8FE6-26030455EC4D}"/>
+                <a16:creationId xmlns:a16="http://schemas.microsoft.com/office/drawing/2014/main" id="{45E7F417-12AE-4250-8B23-0694DA296487}"/>
               </a:ext>
             </a:extLst>
           </p:cNvPr>
@@ -12701,7 +12709,7 @@
           <p:cNvPr id="20" name="">
             <a:extLst xmlns:a="http://schemas.openxmlformats.org/drawingml/2006/main">
               <a:ext uri="{FF2B5EF4-FFF2-40B4-BE49-F238E27FC236}">
-                <a16:creationId xmlns:a16="http://schemas.microsoft.com/office/drawing/2014/main" id="{5FD49400-173F-4A3A-A168-FF28DAB30475}"/>
+                <a16:creationId xmlns:a16="http://schemas.microsoft.com/office/drawing/2014/main" id="{A817E600-B375-4FC7-8CC9-70CF742F67C0}"/>
               </a:ext>
             </a:extLst>
           </p:cNvPr>
@@ -12758,7 +12766,7 @@
           <p:cNvPr id="21" name="">
             <a:extLst xmlns:a="http://schemas.openxmlformats.org/drawingml/2006/main">
               <a:ext uri="{FF2B5EF4-FFF2-40B4-BE49-F238E27FC236}">
-                <a16:creationId xmlns:a16="http://schemas.microsoft.com/office/drawing/2014/main" id="{4838611A-7C2D-4F3A-AB42-8782191B8516}"/>
+                <a16:creationId xmlns:a16="http://schemas.microsoft.com/office/drawing/2014/main" id="{E59DE0CA-3C05-478A-AFB3-3B3BC8EE7704}"/>
               </a:ext>
             </a:extLst>
           </p:cNvPr>
@@ -12815,7 +12823,7 @@
           <p:cNvPr id="22" name="">
             <a:extLst xmlns:a="http://schemas.openxmlformats.org/drawingml/2006/main">
               <a:ext uri="{FF2B5EF4-FFF2-40B4-BE49-F238E27FC236}">
-                <a16:creationId xmlns:a16="http://schemas.microsoft.com/office/drawing/2014/main" id="{B7E71535-4F80-4AD0-8DA5-856B55D8BC0A}"/>
+                <a16:creationId xmlns:a16="http://schemas.microsoft.com/office/drawing/2014/main" id="{625E155B-A906-47BA-B4B6-770AF99E0981}"/>
               </a:ext>
             </a:extLst>
           </p:cNvPr>
@@ -12870,7 +12878,7 @@
     </p:spTree>
     <p:extLst>
       <p:ext uri="{BB962C8B-B14F-4D97-AF65-F5344CB8AC3E}">
-        <p14:creationId xmlns:p14="http://schemas.microsoft.com/office/powerpoint/2010/main" val="1165288626"/>
+        <p14:creationId xmlns:p14="http://schemas.microsoft.com/office/powerpoint/2010/main" val="2125111722"/>
       </p:ext>
     </p:extLst>
   </p:cSld>
@@ -13071,7 +13079,7 @@
           <p:cNvPr id="22" name="">
             <a:extLst xmlns:a="http://schemas.openxmlformats.org/drawingml/2006/main">
               <a:ext uri="{FF2B5EF4-FFF2-40B4-BE49-F238E27FC236}">
-                <a16:creationId xmlns:a16="http://schemas.microsoft.com/office/drawing/2014/main" id="{B1256771-C0C6-4C84-BC1E-77677E54644E}"/>
+                <a16:creationId xmlns:a16="http://schemas.microsoft.com/office/drawing/2014/main" id="{3B3BC1CC-7D9E-47A2-B5CA-C5D72B8475AB}"/>
               </a:ext>
             </a:extLst>
           </p:cNvPr>
@@ -13103,7 +13111,7 @@
           <p:cNvPr id="2" name="">
             <a:extLst xmlns:a="http://schemas.openxmlformats.org/drawingml/2006/main">
               <a:ext uri="{FF2B5EF4-FFF2-40B4-BE49-F238E27FC236}">
-                <a16:creationId xmlns:a16="http://schemas.microsoft.com/office/drawing/2014/main" id="{34281C6E-6F91-456A-8A94-F8D319CC3258}"/>
+                <a16:creationId xmlns:a16="http://schemas.microsoft.com/office/drawing/2014/main" id="{59F19530-39EB-4550-8380-139677BE111A}"/>
               </a:ext>
             </a:extLst>
           </p:cNvPr>
@@ -13160,7 +13168,7 @@
           <p:cNvPr id="3" name="">
             <a:extLst xmlns:a="http://schemas.openxmlformats.org/drawingml/2006/main">
               <a:ext uri="{FF2B5EF4-FFF2-40B4-BE49-F238E27FC236}">
-                <a16:creationId xmlns:a16="http://schemas.microsoft.com/office/drawing/2014/main" id="{B58A63C4-E348-4FEB-B920-BECA730A8F20}"/>
+                <a16:creationId xmlns:a16="http://schemas.microsoft.com/office/drawing/2014/main" id="{60D8BC52-B42C-4DA0-93FE-E1FCCCE55ADB}"/>
               </a:ext>
             </a:extLst>
           </p:cNvPr>
@@ -13192,7 +13200,7 @@
           <p:cNvPr id="4" name="">
             <a:extLst xmlns:a="http://schemas.openxmlformats.org/drawingml/2006/main">
               <a:ext uri="{FF2B5EF4-FFF2-40B4-BE49-F238E27FC236}">
-                <a16:creationId xmlns:a16="http://schemas.microsoft.com/office/drawing/2014/main" id="{06F84364-6FE7-4E46-BD16-B4EEBB26AEB7}"/>
+                <a16:creationId xmlns:a16="http://schemas.microsoft.com/office/drawing/2014/main" id="{18C758F5-2DE0-467C-A45C-FCA0FAA14E5D}"/>
               </a:ext>
             </a:extLst>
           </p:cNvPr>
@@ -13249,7 +13257,7 @@
           <p:cNvPr id="5" name="">
             <a:extLst xmlns:a="http://schemas.openxmlformats.org/drawingml/2006/main">
               <a:ext uri="{FF2B5EF4-FFF2-40B4-BE49-F238E27FC236}">
-                <a16:creationId xmlns:a16="http://schemas.microsoft.com/office/drawing/2014/main" id="{65A3698F-EE13-4871-B620-10435065B200}"/>
+                <a16:creationId xmlns:a16="http://schemas.microsoft.com/office/drawing/2014/main" id="{B61C5E89-FD00-4433-B943-70DA0367F0DD}"/>
               </a:ext>
             </a:extLst>
           </p:cNvPr>
@@ -13306,7 +13314,7 @@
           <p:cNvPr id="6" name="">
             <a:extLst xmlns:a="http://schemas.openxmlformats.org/drawingml/2006/main">
               <a:ext uri="{FF2B5EF4-FFF2-40B4-BE49-F238E27FC236}">
-                <a16:creationId xmlns:a16="http://schemas.microsoft.com/office/drawing/2014/main" id="{98DC58F3-70F2-4480-B792-C0256C0A0813}"/>
+                <a16:creationId xmlns:a16="http://schemas.microsoft.com/office/drawing/2014/main" id="{889277FC-13DF-4E12-94CE-E291D820070A}"/>
               </a:ext>
             </a:extLst>
           </p:cNvPr>
@@ -13363,7 +13371,7 @@
           <p:cNvPr id="7" name="">
             <a:extLst xmlns:a="http://schemas.openxmlformats.org/drawingml/2006/main">
               <a:ext uri="{FF2B5EF4-FFF2-40B4-BE49-F238E27FC236}">
-                <a16:creationId xmlns:a16="http://schemas.microsoft.com/office/drawing/2014/main" id="{95FD4FE1-E53A-4321-A406-BC26AE7FB4CE}"/>
+                <a16:creationId xmlns:a16="http://schemas.microsoft.com/office/drawing/2014/main" id="{B29C983B-9D05-4D2F-907F-62630E7F64B6}"/>
               </a:ext>
             </a:extLst>
           </p:cNvPr>
@@ -13395,7 +13403,7 @@
           <p:cNvPr id="8" name="">
             <a:extLst xmlns:a="http://schemas.openxmlformats.org/drawingml/2006/main">
               <a:ext uri="{FF2B5EF4-FFF2-40B4-BE49-F238E27FC236}">
-                <a16:creationId xmlns:a16="http://schemas.microsoft.com/office/drawing/2014/main" id="{E77F5D39-A9FB-43DC-BCDA-21D9986EA984}"/>
+                <a16:creationId xmlns:a16="http://schemas.microsoft.com/office/drawing/2014/main" id="{28E4255A-FF4D-4ACF-B914-90CFE4B5C6E5}"/>
               </a:ext>
             </a:extLst>
           </p:cNvPr>
@@ -13452,7 +13460,7 @@
           <p:cNvPr id="9" name="">
             <a:extLst xmlns:a="http://schemas.openxmlformats.org/drawingml/2006/main">
               <a:ext uri="{FF2B5EF4-FFF2-40B4-BE49-F238E27FC236}">
-                <a16:creationId xmlns:a16="http://schemas.microsoft.com/office/drawing/2014/main" id="{774625CC-23F3-45B2-A9B8-8415081477F7}"/>
+                <a16:creationId xmlns:a16="http://schemas.microsoft.com/office/drawing/2014/main" id="{A0A95D62-FAD6-4CD5-9E7E-0373D17F0DB1}"/>
               </a:ext>
             </a:extLst>
           </p:cNvPr>
@@ -13509,7 +13517,7 @@
           <p:cNvPr id="10" name="">
             <a:extLst xmlns:a="http://schemas.openxmlformats.org/drawingml/2006/main">
               <a:ext uri="{FF2B5EF4-FFF2-40B4-BE49-F238E27FC236}">
-                <a16:creationId xmlns:a16="http://schemas.microsoft.com/office/drawing/2014/main" id="{9F1CF85B-9ACA-4EDA-8717-480E735A1688}"/>
+                <a16:creationId xmlns:a16="http://schemas.microsoft.com/office/drawing/2014/main" id="{71739DAD-4F44-4D7A-84B0-BE9B71F85EEF}"/>
               </a:ext>
             </a:extLst>
           </p:cNvPr>
@@ -13543,7 +13551,7 @@
           <p:cNvPr id="11" name="">
             <a:extLst xmlns:a="http://schemas.openxmlformats.org/drawingml/2006/main">
               <a:ext uri="{FF2B5EF4-FFF2-40B4-BE49-F238E27FC236}">
-                <a16:creationId xmlns:a16="http://schemas.microsoft.com/office/drawing/2014/main" id="{86E4EB0E-40E4-4AE9-BBEB-84C8DEAC7555}"/>
+                <a16:creationId xmlns:a16="http://schemas.microsoft.com/office/drawing/2014/main" id="{4BCABE05-5938-4DEE-971F-D8F859B4B378}"/>
               </a:ext>
             </a:extLst>
           </p:cNvPr>
@@ -13575,7 +13583,7 @@
           <p:cNvPr id="12" name="">
             <a:extLst xmlns:a="http://schemas.openxmlformats.org/drawingml/2006/main">
               <a:ext uri="{FF2B5EF4-FFF2-40B4-BE49-F238E27FC236}">
-                <a16:creationId xmlns:a16="http://schemas.microsoft.com/office/drawing/2014/main" id="{209344A6-AD10-4FC0-BECE-D9ECE778EC4F}"/>
+                <a16:creationId xmlns:a16="http://schemas.microsoft.com/office/drawing/2014/main" id="{4B87C7CF-EBA4-4E33-B626-FD07C5A66E0E}"/>
               </a:ext>
             </a:extLst>
           </p:cNvPr>
@@ -13632,7 +13640,7 @@
           <p:cNvPr id="13" name="">
             <a:extLst xmlns:a="http://schemas.openxmlformats.org/drawingml/2006/main">
               <a:ext uri="{FF2B5EF4-FFF2-40B4-BE49-F238E27FC236}">
-                <a16:creationId xmlns:a16="http://schemas.microsoft.com/office/drawing/2014/main" id="{23AF0BD3-01E6-4F24-B6B6-B6409A13CB31}"/>
+                <a16:creationId xmlns:a16="http://schemas.microsoft.com/office/drawing/2014/main" id="{4AAA1F43-B81C-45E5-8CF7-D93FC9AF1C41}"/>
               </a:ext>
             </a:extLst>
           </p:cNvPr>
@@ -13689,7 +13697,7 @@
           <p:cNvPr id="14" name="">
             <a:extLst xmlns:a="http://schemas.openxmlformats.org/drawingml/2006/main">
               <a:ext uri="{FF2B5EF4-FFF2-40B4-BE49-F238E27FC236}">
-                <a16:creationId xmlns:a16="http://schemas.microsoft.com/office/drawing/2014/main" id="{0A7149C8-C380-4EA2-88B8-8234FFDF02ED}"/>
+                <a16:creationId xmlns:a16="http://schemas.microsoft.com/office/drawing/2014/main" id="{396F0630-A3E6-4A60-99A7-65D7FA5A01FC}"/>
               </a:ext>
             </a:extLst>
           </p:cNvPr>
@@ -13723,7 +13731,7 @@
           <p:cNvPr id="15" name="">
             <a:extLst xmlns:a="http://schemas.openxmlformats.org/drawingml/2006/main">
               <a:ext uri="{FF2B5EF4-FFF2-40B4-BE49-F238E27FC236}">
-                <a16:creationId xmlns:a16="http://schemas.microsoft.com/office/drawing/2014/main" id="{1C39D63F-4888-491D-BCF1-1A092F1143A1}"/>
+                <a16:creationId xmlns:a16="http://schemas.microsoft.com/office/drawing/2014/main" id="{109F91FD-818E-4184-8C6F-0FEDCBA325E5}"/>
               </a:ext>
             </a:extLst>
           </p:cNvPr>
@@ -13755,7 +13763,7 @@
           <p:cNvPr id="16" name="">
             <a:extLst xmlns:a="http://schemas.openxmlformats.org/drawingml/2006/main">
               <a:ext uri="{FF2B5EF4-FFF2-40B4-BE49-F238E27FC236}">
-                <a16:creationId xmlns:a16="http://schemas.microsoft.com/office/drawing/2014/main" id="{4F9761FD-507B-4ED2-80BF-25912EF5CBA1}"/>
+                <a16:creationId xmlns:a16="http://schemas.microsoft.com/office/drawing/2014/main" id="{CB1DA56F-3650-467A-9715-20F718120ECA}"/>
               </a:ext>
             </a:extLst>
           </p:cNvPr>
@@ -13812,7 +13820,7 @@
           <p:cNvPr id="17" name="">
             <a:extLst xmlns:a="http://schemas.openxmlformats.org/drawingml/2006/main">
               <a:ext uri="{FF2B5EF4-FFF2-40B4-BE49-F238E27FC236}">
-                <a16:creationId xmlns:a16="http://schemas.microsoft.com/office/drawing/2014/main" id="{0F56E121-042F-40D9-AC23-13820DEF5E80}"/>
+                <a16:creationId xmlns:a16="http://schemas.microsoft.com/office/drawing/2014/main" id="{C16C4D14-18E2-4B00-9B4B-AA648B1F2BB4}"/>
               </a:ext>
             </a:extLst>
           </p:cNvPr>
@@ -13869,7 +13877,7 @@
           <p:cNvPr id="18" name="">
             <a:extLst xmlns:a="http://schemas.openxmlformats.org/drawingml/2006/main">
               <a:ext uri="{FF2B5EF4-FFF2-40B4-BE49-F238E27FC236}">
-                <a16:creationId xmlns:a16="http://schemas.microsoft.com/office/drawing/2014/main" id="{6DDEEB17-AA26-4333-B8C3-1DAADCC656CA}"/>
+                <a16:creationId xmlns:a16="http://schemas.microsoft.com/office/drawing/2014/main" id="{1636DEC6-5DCD-4E2D-A396-669C604E3A48}"/>
               </a:ext>
             </a:extLst>
           </p:cNvPr>
@@ -13903,7 +13911,7 @@
           <p:cNvPr id="19" name="">
             <a:extLst xmlns:a="http://schemas.openxmlformats.org/drawingml/2006/main">
               <a:ext uri="{FF2B5EF4-FFF2-40B4-BE49-F238E27FC236}">
-                <a16:creationId xmlns:a16="http://schemas.microsoft.com/office/drawing/2014/main" id="{7223DF0E-AE80-40B5-B556-7B7A341592C7}"/>
+                <a16:creationId xmlns:a16="http://schemas.microsoft.com/office/drawing/2014/main" id="{719E1FBC-0545-40B1-8C19-38A571A9AA66}"/>
               </a:ext>
             </a:extLst>
           </p:cNvPr>
@@ -13935,7 +13943,7 @@
           <p:cNvPr id="20" name="">
             <a:extLst xmlns:a="http://schemas.openxmlformats.org/drawingml/2006/main">
               <a:ext uri="{FF2B5EF4-FFF2-40B4-BE49-F238E27FC236}">
-                <a16:creationId xmlns:a16="http://schemas.microsoft.com/office/drawing/2014/main" id="{6667F86A-207C-41B6-BDD1-593C16FF7499}"/>
+                <a16:creationId xmlns:a16="http://schemas.microsoft.com/office/drawing/2014/main" id="{A4AB1244-B671-4343-83DF-B2B134681D8E}"/>
               </a:ext>
             </a:extLst>
           </p:cNvPr>
@@ -13992,7 +14000,7 @@
           <p:cNvPr id="21" name="">
             <a:extLst xmlns:a="http://schemas.openxmlformats.org/drawingml/2006/main">
               <a:ext uri="{FF2B5EF4-FFF2-40B4-BE49-F238E27FC236}">
-                <a16:creationId xmlns:a16="http://schemas.microsoft.com/office/drawing/2014/main" id="{EBEFF6CF-C08D-4263-BEDA-0E7BE4E79922}"/>
+                <a16:creationId xmlns:a16="http://schemas.microsoft.com/office/drawing/2014/main" id="{D2CBBF63-7696-4F95-ABFC-A3C8FC613432}"/>
               </a:ext>
             </a:extLst>
           </p:cNvPr>
@@ -14047,7 +14055,7 @@
     </p:spTree>
     <p:extLst>
       <p:ext uri="{BB962C8B-B14F-4D97-AF65-F5344CB8AC3E}">
-        <p14:creationId xmlns:p14="http://schemas.microsoft.com/office/powerpoint/2010/main" val="986520563"/>
+        <p14:creationId xmlns:p14="http://schemas.microsoft.com/office/powerpoint/2010/main" val="478172509"/>
       </p:ext>
     </p:extLst>
   </p:cSld>
